--- a/ppt/MachineLearning11-MachineLearning.pptx
+++ b/ppt/MachineLearning11-MachineLearning.pptx
@@ -5,60 +5,62 @@
     <p:sldMasterId id="2147483653" r:id="rId1"/>
   </p:sldMasterIdLst>
   <p:notesMasterIdLst>
-    <p:notesMasterId r:id="rId50"/>
+    <p:notesMasterId r:id="rId52"/>
   </p:notesMasterIdLst>
   <p:handoutMasterIdLst>
-    <p:handoutMasterId r:id="rId51"/>
+    <p:handoutMasterId r:id="rId53"/>
   </p:handoutMasterIdLst>
   <p:sldIdLst>
     <p:sldId id="264" r:id="rId2"/>
-    <p:sldId id="320" r:id="rId3"/>
-    <p:sldId id="266" r:id="rId4"/>
-    <p:sldId id="267" r:id="rId5"/>
-    <p:sldId id="268" r:id="rId6"/>
-    <p:sldId id="269" r:id="rId7"/>
-    <p:sldId id="270" r:id="rId8"/>
-    <p:sldId id="271" r:id="rId9"/>
-    <p:sldId id="272" r:id="rId10"/>
-    <p:sldId id="287" r:id="rId11"/>
-    <p:sldId id="273" r:id="rId12"/>
-    <p:sldId id="274" r:id="rId13"/>
-    <p:sldId id="306" r:id="rId14"/>
-    <p:sldId id="288" r:id="rId15"/>
-    <p:sldId id="289" r:id="rId16"/>
-    <p:sldId id="290" r:id="rId17"/>
-    <p:sldId id="275" r:id="rId18"/>
-    <p:sldId id="291" r:id="rId19"/>
-    <p:sldId id="292" r:id="rId20"/>
-    <p:sldId id="294" r:id="rId21"/>
-    <p:sldId id="295" r:id="rId22"/>
-    <p:sldId id="296" r:id="rId23"/>
-    <p:sldId id="276" r:id="rId24"/>
-    <p:sldId id="277" r:id="rId25"/>
-    <p:sldId id="319" r:id="rId26"/>
-    <p:sldId id="278" r:id="rId27"/>
-    <p:sldId id="279" r:id="rId28"/>
-    <p:sldId id="280" r:id="rId29"/>
-    <p:sldId id="281" r:id="rId30"/>
-    <p:sldId id="283" r:id="rId31"/>
-    <p:sldId id="284" r:id="rId32"/>
-    <p:sldId id="285" r:id="rId33"/>
-    <p:sldId id="286" r:id="rId34"/>
-    <p:sldId id="301" r:id="rId35"/>
-    <p:sldId id="303" r:id="rId36"/>
-    <p:sldId id="304" r:id="rId37"/>
-    <p:sldId id="317" r:id="rId38"/>
-    <p:sldId id="316" r:id="rId39"/>
-    <p:sldId id="311" r:id="rId40"/>
-    <p:sldId id="312" r:id="rId41"/>
-    <p:sldId id="313" r:id="rId42"/>
-    <p:sldId id="314" r:id="rId43"/>
-    <p:sldId id="321" r:id="rId44"/>
-    <p:sldId id="322" r:id="rId45"/>
-    <p:sldId id="297" r:id="rId46"/>
-    <p:sldId id="299" r:id="rId47"/>
-    <p:sldId id="318" r:id="rId48"/>
-    <p:sldId id="300" r:id="rId49"/>
+    <p:sldId id="323" r:id="rId3"/>
+    <p:sldId id="320" r:id="rId4"/>
+    <p:sldId id="266" r:id="rId5"/>
+    <p:sldId id="267" r:id="rId6"/>
+    <p:sldId id="268" r:id="rId7"/>
+    <p:sldId id="269" r:id="rId8"/>
+    <p:sldId id="270" r:id="rId9"/>
+    <p:sldId id="271" r:id="rId10"/>
+    <p:sldId id="272" r:id="rId11"/>
+    <p:sldId id="287" r:id="rId12"/>
+    <p:sldId id="358" r:id="rId13"/>
+    <p:sldId id="273" r:id="rId14"/>
+    <p:sldId id="274" r:id="rId15"/>
+    <p:sldId id="306" r:id="rId16"/>
+    <p:sldId id="288" r:id="rId17"/>
+    <p:sldId id="289" r:id="rId18"/>
+    <p:sldId id="290" r:id="rId19"/>
+    <p:sldId id="275" r:id="rId20"/>
+    <p:sldId id="291" r:id="rId21"/>
+    <p:sldId id="292" r:id="rId22"/>
+    <p:sldId id="294" r:id="rId23"/>
+    <p:sldId id="295" r:id="rId24"/>
+    <p:sldId id="296" r:id="rId25"/>
+    <p:sldId id="276" r:id="rId26"/>
+    <p:sldId id="277" r:id="rId27"/>
+    <p:sldId id="319" r:id="rId28"/>
+    <p:sldId id="278" r:id="rId29"/>
+    <p:sldId id="279" r:id="rId30"/>
+    <p:sldId id="280" r:id="rId31"/>
+    <p:sldId id="281" r:id="rId32"/>
+    <p:sldId id="283" r:id="rId33"/>
+    <p:sldId id="284" r:id="rId34"/>
+    <p:sldId id="285" r:id="rId35"/>
+    <p:sldId id="286" r:id="rId36"/>
+    <p:sldId id="301" r:id="rId37"/>
+    <p:sldId id="303" r:id="rId38"/>
+    <p:sldId id="304" r:id="rId39"/>
+    <p:sldId id="317" r:id="rId40"/>
+    <p:sldId id="316" r:id="rId41"/>
+    <p:sldId id="311" r:id="rId42"/>
+    <p:sldId id="312" r:id="rId43"/>
+    <p:sldId id="313" r:id="rId44"/>
+    <p:sldId id="314" r:id="rId45"/>
+    <p:sldId id="321" r:id="rId46"/>
+    <p:sldId id="322" r:id="rId47"/>
+    <p:sldId id="297" r:id="rId48"/>
+    <p:sldId id="299" r:id="rId49"/>
+    <p:sldId id="318" r:id="rId50"/>
+    <p:sldId id="300" r:id="rId51"/>
   </p:sldIdLst>
   <p:sldSz cx="9144000" cy="6858000" type="screen4x3"/>
   <p:notesSz cx="6648450" cy="9782175"/>
@@ -3718,7 +3720,7 @@
             <a:pPr eaLnBrk="1" hangingPunct="1"/>
             <a:r>
               <a:rPr lang="fr-FR" altLang="fr-FR" dirty="0"/>
-              <a:t>Chapitre 7</a:t>
+              <a:t>Chapitre 11</a:t>
             </a:r>
           </a:p>
           <a:p>
@@ -3792,6 +3794,145 @@
 </file>
 
 <file path=ppt/slides/slide10.xml><?xml version="1.0" encoding="utf-8"?>
+<p:sld xmlns:a="http://schemas.openxmlformats.org/drawingml/2006/main" xmlns:r="http://schemas.openxmlformats.org/officeDocument/2006/relationships" xmlns:p="http://schemas.openxmlformats.org/presentationml/2006/main">
+  <p:cSld>
+    <p:spTree>
+      <p:nvGrpSpPr>
+        <p:cNvPr id="1" name=""/>
+        <p:cNvGrpSpPr/>
+        <p:nvPr/>
+      </p:nvGrpSpPr>
+      <p:grpSpPr>
+        <a:xfrm>
+          <a:off x="0" y="0"/>
+          <a:ext cx="0" cy="0"/>
+          <a:chOff x="0" y="0"/>
+          <a:chExt cx="0" cy="0"/>
+        </a:xfrm>
+      </p:grpSpPr>
+      <p:sp>
+        <p:nvSpPr>
+          <p:cNvPr id="2" name="Titre 1"/>
+          <p:cNvSpPr>
+            <a:spLocks noGrp="1"/>
+          </p:cNvSpPr>
+          <p:nvPr>
+            <p:ph type="title"/>
+          </p:nvPr>
+        </p:nvSpPr>
+        <p:spPr/>
+        <p:txBody>
+          <a:bodyPr/>
+          <a:lstStyle/>
+          <a:p>
+            <a:r>
+              <a:rPr lang="fr-FR" dirty="0"/>
+              <a:t>Erreur</a:t>
+            </a:r>
+          </a:p>
+        </p:txBody>
+      </p:sp>
+      <p:sp>
+        <p:nvSpPr>
+          <p:cNvPr id="3" name="Espace réservé du contenu 2"/>
+          <p:cNvSpPr>
+            <a:spLocks noGrp="1"/>
+          </p:cNvSpPr>
+          <p:nvPr>
+            <p:ph idx="1"/>
+          </p:nvPr>
+        </p:nvSpPr>
+        <p:spPr/>
+        <p:txBody>
+          <a:bodyPr/>
+          <a:lstStyle/>
+          <a:p>
+            <a:r>
+              <a:rPr lang="fr-FR" dirty="0"/>
+              <a:t>Un écart type et un taux de confiance peut être calculé</a:t>
+            </a:r>
+          </a:p>
+          <a:p>
+            <a:endParaRPr lang="fr-FR" dirty="0"/>
+          </a:p>
+          <a:p>
+            <a:endParaRPr lang="fr-FR" dirty="0"/>
+          </a:p>
+          <a:p>
+            <a:endParaRPr lang="fr-FR" dirty="0"/>
+          </a:p>
+          <a:p>
+            <a:endParaRPr lang="fr-FR" dirty="0"/>
+          </a:p>
+          <a:p>
+            <a:endParaRPr lang="fr-FR" dirty="0"/>
+          </a:p>
+          <a:p>
+            <a:endParaRPr lang="fr-FR" dirty="0"/>
+          </a:p>
+          <a:p>
+            <a:r>
+              <a:rPr lang="fr-FR" dirty="0"/>
+              <a:t>Exemple : taux de confiance à 90%</a:t>
+            </a:r>
+          </a:p>
+        </p:txBody>
+      </p:sp>
+      <p:pic>
+        <p:nvPicPr>
+          <p:cNvPr id="3074" name="Picture 2" descr="l'intervalle de confiance (à 90%) que les point se trouvent dans cette zone"/>
+          <p:cNvPicPr>
+            <a:picLocks noChangeAspect="1" noChangeArrowheads="1"/>
+          </p:cNvPicPr>
+          <p:nvPr/>
+        </p:nvPicPr>
+        <p:blipFill>
+          <a:blip r:embed="rId2">
+            <a:extLst>
+              <a:ext uri="{28A0092B-C50C-407E-A947-70E740481C1C}">
+                <a14:useLocalDpi xmlns:a14="http://schemas.microsoft.com/office/drawing/2010/main" val="0"/>
+              </a:ext>
+            </a:extLst>
+          </a:blip>
+          <a:srcRect/>
+          <a:stretch>
+            <a:fillRect/>
+          </a:stretch>
+        </p:blipFill>
+        <p:spPr bwMode="auto">
+          <a:xfrm>
+            <a:off x="2195736" y="2276872"/>
+            <a:ext cx="4286250" cy="3000376"/>
+          </a:xfrm>
+          <a:prstGeom prst="rect">
+            <a:avLst/>
+          </a:prstGeom>
+          <a:noFill/>
+          <a:extLst>
+            <a:ext uri="{909E8E84-426E-40DD-AFC4-6F175D3DCCD1}">
+              <a14:hiddenFill xmlns:a14="http://schemas.microsoft.com/office/drawing/2010/main">
+                <a:solidFill>
+                  <a:srgbClr val="FFFFFF"/>
+                </a:solidFill>
+              </a14:hiddenFill>
+            </a:ext>
+          </a:extLst>
+        </p:spPr>
+      </p:pic>
+    </p:spTree>
+    <p:extLst>
+      <p:ext uri="{BB962C8B-B14F-4D97-AF65-F5344CB8AC3E}">
+        <p14:creationId xmlns:p14="http://schemas.microsoft.com/office/powerpoint/2010/main" val="2468921661"/>
+      </p:ext>
+    </p:extLst>
+  </p:cSld>
+  <p:clrMapOvr>
+    <a:masterClrMapping/>
+  </p:clrMapOvr>
+</p:sld>
+</file>
+
+<file path=ppt/slides/slide11.xml><?xml version="1.0" encoding="utf-8"?>
 <p:sld xmlns:a="http://schemas.openxmlformats.org/drawingml/2006/main" xmlns:r="http://schemas.openxmlformats.org/officeDocument/2006/relationships" xmlns:p="http://schemas.openxmlformats.org/presentationml/2006/main">
   <p:cSld>
     <p:spTree>
@@ -3934,7 +4075,7 @@
 </p:sld>
 </file>
 
-<file path=ppt/slides/slide11.xml><?xml version="1.0" encoding="utf-8"?>
+<file path=ppt/slides/slide12.xml><?xml version="1.0" encoding="utf-8"?>
 <p:sld xmlns:a="http://schemas.openxmlformats.org/drawingml/2006/main" xmlns:r="http://schemas.openxmlformats.org/officeDocument/2006/relationships" xmlns:p="http://schemas.openxmlformats.org/presentationml/2006/main">
   <p:cSld>
     <p:spTree>
@@ -3953,6 +4094,159 @@
       </p:grpSpPr>
       <p:sp>
         <p:nvSpPr>
+          <p:cNvPr id="2" name="Titre 1">
+            <a:extLst>
+              <a:ext uri="{FF2B5EF4-FFF2-40B4-BE49-F238E27FC236}">
+                <a16:creationId xmlns:a16="http://schemas.microsoft.com/office/drawing/2014/main" id="{43B79A36-DCA2-04FF-4BD9-ADEA618418F6}"/>
+              </a:ext>
+            </a:extLst>
+          </p:cNvPr>
+          <p:cNvSpPr>
+            <a:spLocks noGrp="1"/>
+          </p:cNvSpPr>
+          <p:nvPr>
+            <p:ph type="title"/>
+          </p:nvPr>
+        </p:nvSpPr>
+        <p:spPr/>
+        <p:txBody>
+          <a:bodyPr/>
+          <a:lstStyle/>
+          <a:p>
+            <a:r>
+              <a:rPr lang="fr-FR" dirty="0"/>
+              <a:t>Principes mathématiques</a:t>
+            </a:r>
+          </a:p>
+        </p:txBody>
+      </p:sp>
+      <p:sp>
+        <p:nvSpPr>
+          <p:cNvPr id="3" name="Espace réservé du contenu 2">
+            <a:extLst>
+              <a:ext uri="{FF2B5EF4-FFF2-40B4-BE49-F238E27FC236}">
+                <a16:creationId xmlns:a16="http://schemas.microsoft.com/office/drawing/2014/main" id="{AA9957CF-3C17-0A94-E370-57CDB0345762}"/>
+              </a:ext>
+            </a:extLst>
+          </p:cNvPr>
+          <p:cNvSpPr>
+            <a:spLocks noGrp="1"/>
+          </p:cNvSpPr>
+          <p:nvPr>
+            <p:ph idx="1"/>
+          </p:nvPr>
+        </p:nvSpPr>
+        <p:spPr/>
+        <p:txBody>
+          <a:bodyPr/>
+          <a:lstStyle/>
+          <a:p>
+            <a:r>
+              <a:rPr lang="fr-FR" dirty="0"/>
+              <a:t>De nombreux principes mathématiques et statistiques régissent le Machine Learning</a:t>
+            </a:r>
+          </a:p>
+          <a:p>
+            <a:pPr lvl="1"/>
+            <a:r>
+              <a:rPr lang="fr-FR" sz="2000" dirty="0"/>
+              <a:t>D'avantage pour le </a:t>
+            </a:r>
+            <a:r>
+              <a:rPr lang="fr-FR" sz="2000"/>
+              <a:t>Deep Learning</a:t>
+            </a:r>
+            <a:endParaRPr lang="fr-FR" sz="2000" dirty="0"/>
+          </a:p>
+          <a:p>
+            <a:r>
+              <a:rPr lang="fr-FR" dirty="0"/>
+              <a:t>Statistiques</a:t>
+            </a:r>
+          </a:p>
+          <a:p>
+            <a:pPr lvl="1"/>
+            <a:r>
+              <a:rPr lang="fr-FR" sz="2000" dirty="0"/>
+              <a:t>Distribution, loi normale, échantillonnage</a:t>
+            </a:r>
+          </a:p>
+          <a:p>
+            <a:r>
+              <a:rPr lang="fr-FR" dirty="0"/>
+              <a:t>Algorithmiques</a:t>
+            </a:r>
+            <a:endParaRPr lang="fr-FR" sz="2000" dirty="0"/>
+          </a:p>
+          <a:p>
+            <a:r>
+              <a:rPr lang="fr-FR" dirty="0"/>
+              <a:t>MDP</a:t>
+            </a:r>
+          </a:p>
+          <a:p>
+            <a:pPr lvl="1"/>
+            <a:r>
+              <a:rPr lang="fr-FR" sz="2000" dirty="0"/>
+              <a:t>Les processus de décision markoviens modélisent des états, actions et </a:t>
+            </a:r>
+            <a:r>
+              <a:rPr lang="fr-FR" sz="1800" dirty="0"/>
+              <a:t>récompenses </a:t>
+            </a:r>
+            <a:r>
+              <a:rPr lang="fr-FR" dirty="0"/>
+              <a:t>pour la prise de décision séquentielle.​</a:t>
+            </a:r>
+            <a:endParaRPr lang="fr-FR" sz="2800" dirty="0"/>
+          </a:p>
+          <a:p>
+            <a:r>
+              <a:rPr lang="fr-FR" dirty="0"/>
+              <a:t>Équations de Bellman​</a:t>
+            </a:r>
+          </a:p>
+          <a:p>
+            <a:pPr lvl="1"/>
+            <a:r>
+              <a:rPr lang="fr-FR" sz="2000" dirty="0"/>
+              <a:t>Les équations de Bellman définissent la relation récursive pour calculer les fonctions des valeurs optimales.​</a:t>
+            </a:r>
+          </a:p>
+        </p:txBody>
+      </p:sp>
+    </p:spTree>
+    <p:extLst>
+      <p:ext uri="{BB962C8B-B14F-4D97-AF65-F5344CB8AC3E}">
+        <p14:creationId xmlns:p14="http://schemas.microsoft.com/office/powerpoint/2010/main" val="2444278080"/>
+      </p:ext>
+    </p:extLst>
+  </p:cSld>
+  <p:clrMapOvr>
+    <a:masterClrMapping/>
+  </p:clrMapOvr>
+</p:sld>
+</file>
+
+<file path=ppt/slides/slide13.xml><?xml version="1.0" encoding="utf-8"?>
+<p:sld xmlns:a="http://schemas.openxmlformats.org/drawingml/2006/main" xmlns:r="http://schemas.openxmlformats.org/officeDocument/2006/relationships" xmlns:p="http://schemas.openxmlformats.org/presentationml/2006/main">
+  <p:cSld>
+    <p:spTree>
+      <p:nvGrpSpPr>
+        <p:cNvPr id="1" name=""/>
+        <p:cNvGrpSpPr/>
+        <p:nvPr/>
+      </p:nvGrpSpPr>
+      <p:grpSpPr>
+        <a:xfrm>
+          <a:off x="0" y="0"/>
+          <a:ext cx="0" cy="0"/>
+          <a:chOff x="0" y="0"/>
+          <a:chExt cx="0" cy="0"/>
+        </a:xfrm>
+      </p:grpSpPr>
+      <p:sp>
+        <p:nvSpPr>
           <p:cNvPr id="2" name="Titre 1"/>
           <p:cNvSpPr>
             <a:spLocks noGrp="1"/>
@@ -4033,7 +4327,7 @@
 </p:sld>
 </file>
 
-<file path=ppt/slides/slide12.xml><?xml version="1.0" encoding="utf-8"?>
+<file path=ppt/slides/slide14.xml><?xml version="1.0" encoding="utf-8"?>
 <p:sld xmlns:a="http://schemas.openxmlformats.org/drawingml/2006/main" xmlns:r="http://schemas.openxmlformats.org/officeDocument/2006/relationships" xmlns:p="http://schemas.openxmlformats.org/presentationml/2006/main">
   <p:cSld>
     <p:spTree>
@@ -4160,7 +4454,7 @@
 </p:sld>
 </file>
 
-<file path=ppt/slides/slide13.xml><?xml version="1.0" encoding="utf-8"?>
+<file path=ppt/slides/slide15.xml><?xml version="1.0" encoding="utf-8"?>
 <p:sld xmlns:a="http://schemas.openxmlformats.org/drawingml/2006/main" xmlns:r="http://schemas.openxmlformats.org/officeDocument/2006/relationships" xmlns:p="http://schemas.openxmlformats.org/presentationml/2006/main">
   <p:cSld>
     <p:spTree>
@@ -4275,7 +4569,7 @@
 </p:sld>
 </file>
 
-<file path=ppt/slides/slide14.xml><?xml version="1.0" encoding="utf-8"?>
+<file path=ppt/slides/slide16.xml><?xml version="1.0" encoding="utf-8"?>
 <p:sld xmlns:a="http://schemas.openxmlformats.org/drawingml/2006/main" xmlns:r="http://schemas.openxmlformats.org/officeDocument/2006/relationships" xmlns:p="http://schemas.openxmlformats.org/presentationml/2006/main">
   <p:cSld>
     <p:spTree>
@@ -4461,7 +4755,7 @@
 </p:sld>
 </file>
 
-<file path=ppt/slides/slide15.xml><?xml version="1.0" encoding="utf-8"?>
+<file path=ppt/slides/slide17.xml><?xml version="1.0" encoding="utf-8"?>
 <p:sld xmlns:a="http://schemas.openxmlformats.org/drawingml/2006/main" xmlns:r="http://schemas.openxmlformats.org/officeDocument/2006/relationships" xmlns:p="http://schemas.openxmlformats.org/presentationml/2006/main">
   <p:cSld>
     <p:spTree>
@@ -4618,7 +4912,7 @@
 </p:sld>
 </file>
 
-<file path=ppt/slides/slide16.xml><?xml version="1.0" encoding="utf-8"?>
+<file path=ppt/slides/slide18.xml><?xml version="1.0" encoding="utf-8"?>
 <p:sld xmlns:a="http://schemas.openxmlformats.org/drawingml/2006/main" xmlns:r="http://schemas.openxmlformats.org/officeDocument/2006/relationships" xmlns:p="http://schemas.openxmlformats.org/presentationml/2006/main">
   <p:cSld>
     <p:spTree>
@@ -4777,7 +5071,7 @@
 </p:sld>
 </file>
 
-<file path=ppt/slides/slide17.xml><?xml version="1.0" encoding="utf-8"?>
+<file path=ppt/slides/slide19.xml><?xml version="1.0" encoding="utf-8"?>
 <p:sld xmlns:a="http://schemas.openxmlformats.org/drawingml/2006/main" xmlns:r="http://schemas.openxmlformats.org/officeDocument/2006/relationships" xmlns:p="http://schemas.openxmlformats.org/presentationml/2006/main">
   <p:cSld>
     <p:spTree>
@@ -4872,7 +5166,134 @@
 </p:sld>
 </file>
 
-<file path=ppt/slides/slide18.xml><?xml version="1.0" encoding="utf-8"?>
+<file path=ppt/slides/slide2.xml><?xml version="1.0" encoding="utf-8"?>
+<p:sld xmlns:a="http://schemas.openxmlformats.org/drawingml/2006/main" xmlns:r="http://schemas.openxmlformats.org/officeDocument/2006/relationships" xmlns:p="http://schemas.openxmlformats.org/presentationml/2006/main">
+  <p:cSld>
+    <p:spTree>
+      <p:nvGrpSpPr>
+        <p:cNvPr id="1" name=""/>
+        <p:cNvGrpSpPr/>
+        <p:nvPr/>
+      </p:nvGrpSpPr>
+      <p:grpSpPr>
+        <a:xfrm>
+          <a:off x="0" y="0"/>
+          <a:ext cx="0" cy="0"/>
+          <a:chOff x="0" y="0"/>
+          <a:chExt cx="0" cy="0"/>
+        </a:xfrm>
+      </p:grpSpPr>
+      <p:sp>
+        <p:nvSpPr>
+          <p:cNvPr id="2" name="Titre 1">
+            <a:extLst>
+              <a:ext uri="{FF2B5EF4-FFF2-40B4-BE49-F238E27FC236}">
+                <a16:creationId xmlns:a16="http://schemas.microsoft.com/office/drawing/2014/main" id="{9B42ED8F-11AB-C149-14DE-0ECEEA2E5B23}"/>
+              </a:ext>
+            </a:extLst>
+          </p:cNvPr>
+          <p:cNvSpPr>
+            <a:spLocks noGrp="1"/>
+          </p:cNvSpPr>
+          <p:nvPr>
+            <p:ph type="title"/>
+          </p:nvPr>
+        </p:nvSpPr>
+        <p:spPr/>
+        <p:txBody>
+          <a:bodyPr/>
+          <a:lstStyle/>
+          <a:p>
+            <a:endParaRPr lang="fr-FR"/>
+          </a:p>
+        </p:txBody>
+      </p:sp>
+      <p:sp>
+        <p:nvSpPr>
+          <p:cNvPr id="3" name="Espace réservé du contenu 2">
+            <a:extLst>
+              <a:ext uri="{FF2B5EF4-FFF2-40B4-BE49-F238E27FC236}">
+                <a16:creationId xmlns:a16="http://schemas.microsoft.com/office/drawing/2014/main" id="{A164126B-6D65-4283-A1F1-8A8BB03CBF63}"/>
+              </a:ext>
+            </a:extLst>
+          </p:cNvPr>
+          <p:cNvSpPr>
+            <a:spLocks noGrp="1"/>
+          </p:cNvSpPr>
+          <p:nvPr>
+            <p:ph idx="1"/>
+          </p:nvPr>
+        </p:nvSpPr>
+        <p:spPr/>
+        <p:txBody>
+          <a:bodyPr/>
+          <a:lstStyle/>
+          <a:p>
+            <a:endParaRPr lang="fr-FR"/>
+          </a:p>
+        </p:txBody>
+      </p:sp>
+      <p:pic>
+        <p:nvPicPr>
+          <p:cNvPr id="1026" name="Picture 2" descr="1_hfyjxxcfingbcyzcgksaiq">
+            <a:extLst>
+              <a:ext uri="{FF2B5EF4-FFF2-40B4-BE49-F238E27FC236}">
+                <a16:creationId xmlns:a16="http://schemas.microsoft.com/office/drawing/2014/main" id="{0248DE54-DD5F-56BD-F121-1923D3F5964A}"/>
+              </a:ext>
+            </a:extLst>
+          </p:cNvPr>
+          <p:cNvPicPr>
+            <a:picLocks noChangeAspect="1" noChangeArrowheads="1"/>
+          </p:cNvPicPr>
+          <p:nvPr/>
+        </p:nvPicPr>
+        <p:blipFill>
+          <a:blip r:embed="rId2">
+            <a:extLst>
+              <a:ext uri="{28A0092B-C50C-407E-A947-70E740481C1C}">
+                <a14:useLocalDpi xmlns:a14="http://schemas.microsoft.com/office/drawing/2010/main" val="0"/>
+              </a:ext>
+            </a:extLst>
+          </a:blip>
+          <a:srcRect/>
+          <a:stretch>
+            <a:fillRect/>
+          </a:stretch>
+        </p:blipFill>
+        <p:spPr bwMode="auto">
+          <a:xfrm>
+            <a:off x="25648" y="1156208"/>
+            <a:ext cx="9123224" cy="5225119"/>
+          </a:xfrm>
+          <a:prstGeom prst="rect">
+            <a:avLst/>
+          </a:prstGeom>
+          <a:noFill/>
+          <a:extLst>
+            <a:ext uri="{909E8E84-426E-40DD-AFC4-6F175D3DCCD1}">
+              <a14:hiddenFill xmlns:a14="http://schemas.microsoft.com/office/drawing/2010/main">
+                <a:solidFill>
+                  <a:srgbClr val="FFFFFF"/>
+                </a:solidFill>
+              </a14:hiddenFill>
+            </a:ext>
+          </a:extLst>
+        </p:spPr>
+      </p:pic>
+    </p:spTree>
+    <p:extLst>
+      <p:ext uri="{BB962C8B-B14F-4D97-AF65-F5344CB8AC3E}">
+        <p14:creationId xmlns:p14="http://schemas.microsoft.com/office/powerpoint/2010/main" val="340138480"/>
+      </p:ext>
+    </p:extLst>
+  </p:cSld>
+  <p:clrMapOvr>
+    <a:masterClrMapping/>
+  </p:clrMapOvr>
+</p:sld>
+</file>
+
+<file path=ppt/slides/slide20.xml><?xml version="1.0" encoding="utf-8"?>
 <p:sld xmlns:a="http://schemas.openxmlformats.org/drawingml/2006/main" xmlns:r="http://schemas.openxmlformats.org/officeDocument/2006/relationships" xmlns:p="http://schemas.openxmlformats.org/presentationml/2006/main">
   <p:cSld>
     <p:spTree>
@@ -4999,7 +5420,7 @@
 </p:sld>
 </file>
 
-<file path=ppt/slides/slide19.xml><?xml version="1.0" encoding="utf-8"?>
+<file path=ppt/slides/slide21.xml><?xml version="1.0" encoding="utf-8"?>
 <p:sld xmlns:a="http://schemas.openxmlformats.org/drawingml/2006/main" xmlns:r="http://schemas.openxmlformats.org/officeDocument/2006/relationships" xmlns:p="http://schemas.openxmlformats.org/presentationml/2006/main">
   <p:cSld>
     <p:spTree>
@@ -5141,7 +5562,881 @@
 </p:sld>
 </file>
 
-<file path=ppt/slides/slide2.xml><?xml version="1.0" encoding="utf-8"?>
+<file path=ppt/slides/slide22.xml><?xml version="1.0" encoding="utf-8"?>
+<p:sld xmlns:a="http://schemas.openxmlformats.org/drawingml/2006/main" xmlns:r="http://schemas.openxmlformats.org/officeDocument/2006/relationships" xmlns:p="http://schemas.openxmlformats.org/presentationml/2006/main">
+  <p:cSld>
+    <p:spTree>
+      <p:nvGrpSpPr>
+        <p:cNvPr id="1" name=""/>
+        <p:cNvGrpSpPr/>
+        <p:nvPr/>
+      </p:nvGrpSpPr>
+      <p:grpSpPr>
+        <a:xfrm>
+          <a:off x="0" y="0"/>
+          <a:ext cx="0" cy="0"/>
+          <a:chOff x="0" y="0"/>
+          <a:chExt cx="0" cy="0"/>
+        </a:xfrm>
+      </p:grpSpPr>
+      <p:sp>
+        <p:nvSpPr>
+          <p:cNvPr id="2" name="Titre 1"/>
+          <p:cNvSpPr>
+            <a:spLocks noGrp="1"/>
+          </p:cNvSpPr>
+          <p:nvPr>
+            <p:ph type="title"/>
+          </p:nvPr>
+        </p:nvSpPr>
+        <p:spPr/>
+        <p:txBody>
+          <a:bodyPr/>
+          <a:lstStyle/>
+          <a:p>
+            <a:r>
+              <a:rPr lang="fr-FR" dirty="0"/>
+              <a:t>Loi normale</a:t>
+            </a:r>
+          </a:p>
+        </p:txBody>
+      </p:sp>
+      <p:sp>
+        <p:nvSpPr>
+          <p:cNvPr id="3" name="Espace réservé du contenu 2"/>
+          <p:cNvSpPr>
+            <a:spLocks noGrp="1"/>
+          </p:cNvSpPr>
+          <p:nvPr>
+            <p:ph idx="1"/>
+          </p:nvPr>
+        </p:nvSpPr>
+        <p:spPr/>
+        <p:txBody>
+          <a:bodyPr/>
+          <a:lstStyle/>
+          <a:p>
+            <a:r>
+              <a:rPr lang="fr-FR" dirty="0"/>
+              <a:t>Il est fréquent de considérer que les valeurs se répartissent selon une courbe de Gauss</a:t>
+            </a:r>
+          </a:p>
+          <a:p>
+            <a:pPr lvl="1"/>
+            <a:r>
+              <a:rPr lang="fr-FR" dirty="0"/>
+              <a:t>Dans le cas des sciences sociales, par exemple, la moyenne et l'écart type permettent de déterminer un intervalle dans lequel on trouve une majorité de la population</a:t>
+            </a:r>
+          </a:p>
+          <a:p>
+            <a:pPr lvl="1"/>
+            <a:endParaRPr lang="fr-FR" dirty="0"/>
+          </a:p>
+        </p:txBody>
+      </p:sp>
+      <p:pic>
+        <p:nvPicPr>
+          <p:cNvPr id="4098" name="Picture 2" descr="https://upload.wikimedia.org/wikipedia/commons/thumb/8/8c/Standard_deviation_diagram.svg/400px-Standard_deviation_diagram.svg.png"/>
+          <p:cNvPicPr>
+            <a:picLocks noChangeAspect="1" noChangeArrowheads="1"/>
+          </p:cNvPicPr>
+          <p:nvPr/>
+        </p:nvPicPr>
+        <p:blipFill>
+          <a:blip r:embed="rId2">
+            <a:extLst>
+              <a:ext uri="{28A0092B-C50C-407E-A947-70E740481C1C}">
+                <a14:useLocalDpi xmlns:a14="http://schemas.microsoft.com/office/drawing/2010/main" val="0"/>
+              </a:ext>
+            </a:extLst>
+          </a:blip>
+          <a:srcRect/>
+          <a:stretch>
+            <a:fillRect/>
+          </a:stretch>
+        </p:blipFill>
+        <p:spPr bwMode="auto">
+          <a:xfrm>
+            <a:off x="2339752" y="4221088"/>
+            <a:ext cx="3810000" cy="1905000"/>
+          </a:xfrm>
+          <a:prstGeom prst="rect">
+            <a:avLst/>
+          </a:prstGeom>
+          <a:noFill/>
+          <a:extLst>
+            <a:ext uri="{909E8E84-426E-40DD-AFC4-6F175D3DCCD1}">
+              <a14:hiddenFill xmlns:a14="http://schemas.microsoft.com/office/drawing/2010/main">
+                <a:solidFill>
+                  <a:srgbClr val="FFFFFF"/>
+                </a:solidFill>
+              </a14:hiddenFill>
+            </a:ext>
+          </a:extLst>
+        </p:spPr>
+      </p:pic>
+    </p:spTree>
+    <p:extLst>
+      <p:ext uri="{BB962C8B-B14F-4D97-AF65-F5344CB8AC3E}">
+        <p14:creationId xmlns:p14="http://schemas.microsoft.com/office/powerpoint/2010/main" val="2677704954"/>
+      </p:ext>
+    </p:extLst>
+  </p:cSld>
+  <p:clrMapOvr>
+    <a:masterClrMapping/>
+  </p:clrMapOvr>
+</p:sld>
+</file>
+
+<file path=ppt/slides/slide23.xml><?xml version="1.0" encoding="utf-8"?>
+<p:sld xmlns:a="http://schemas.openxmlformats.org/drawingml/2006/main" xmlns:r="http://schemas.openxmlformats.org/officeDocument/2006/relationships" xmlns:p="http://schemas.openxmlformats.org/presentationml/2006/main">
+  <p:cSld>
+    <p:spTree>
+      <p:nvGrpSpPr>
+        <p:cNvPr id="1" name=""/>
+        <p:cNvGrpSpPr/>
+        <p:nvPr/>
+      </p:nvGrpSpPr>
+      <p:grpSpPr>
+        <a:xfrm>
+          <a:off x="0" y="0"/>
+          <a:ext cx="0" cy="0"/>
+          <a:chOff x="0" y="0"/>
+          <a:chExt cx="0" cy="0"/>
+        </a:xfrm>
+      </p:grpSpPr>
+      <p:sp>
+        <p:nvSpPr>
+          <p:cNvPr id="2" name="Titre 1"/>
+          <p:cNvSpPr>
+            <a:spLocks noGrp="1"/>
+          </p:cNvSpPr>
+          <p:nvPr>
+            <p:ph type="title"/>
+          </p:nvPr>
+        </p:nvSpPr>
+        <p:spPr/>
+        <p:txBody>
+          <a:bodyPr/>
+          <a:lstStyle/>
+          <a:p>
+            <a:r>
+              <a:rPr lang="fr-FR" dirty="0"/>
+              <a:t>Loi normale</a:t>
+            </a:r>
+          </a:p>
+        </p:txBody>
+      </p:sp>
+      <p:sp>
+        <p:nvSpPr>
+          <p:cNvPr id="3" name="Espace réservé du contenu 2"/>
+          <p:cNvSpPr>
+            <a:spLocks noGrp="1"/>
+          </p:cNvSpPr>
+          <p:nvPr>
+            <p:ph idx="1"/>
+          </p:nvPr>
+        </p:nvSpPr>
+        <p:spPr/>
+        <p:txBody>
+          <a:bodyPr/>
+          <a:lstStyle/>
+          <a:p>
+            <a:r>
+              <a:rPr lang="fr-FR" dirty="0"/>
+              <a:t>Avec le calcul de la distribution des données il est possible de filtrer les données trop éloignée de la loi normale</a:t>
+            </a:r>
+          </a:p>
+          <a:p>
+            <a:pPr lvl="1"/>
+            <a:r>
+              <a:rPr lang="fr-FR" dirty="0"/>
+              <a:t>Possibilité de filtrer les données &gt; 3 * Sigma</a:t>
+            </a:r>
+          </a:p>
+          <a:p>
+            <a:r>
+              <a:rPr lang="fr-FR" dirty="0"/>
+              <a:t>Possibilité de calculer la médiane, quartile, décile, centile</a:t>
+            </a:r>
+          </a:p>
+          <a:p>
+            <a:pPr lvl="1"/>
+            <a:endParaRPr lang="fr-FR" dirty="0"/>
+          </a:p>
+        </p:txBody>
+      </p:sp>
+    </p:spTree>
+    <p:extLst>
+      <p:ext uri="{BB962C8B-B14F-4D97-AF65-F5344CB8AC3E}">
+        <p14:creationId xmlns:p14="http://schemas.microsoft.com/office/powerpoint/2010/main" val="2894000027"/>
+      </p:ext>
+    </p:extLst>
+  </p:cSld>
+  <p:clrMapOvr>
+    <a:masterClrMapping/>
+  </p:clrMapOvr>
+</p:sld>
+</file>
+
+<file path=ppt/slides/slide24.xml><?xml version="1.0" encoding="utf-8"?>
+<p:sld xmlns:a="http://schemas.openxmlformats.org/drawingml/2006/main" xmlns:r="http://schemas.openxmlformats.org/officeDocument/2006/relationships" xmlns:p="http://schemas.openxmlformats.org/presentationml/2006/main">
+  <p:cSld>
+    <p:spTree>
+      <p:nvGrpSpPr>
+        <p:cNvPr id="1" name=""/>
+        <p:cNvGrpSpPr/>
+        <p:nvPr/>
+      </p:nvGrpSpPr>
+      <p:grpSpPr>
+        <a:xfrm>
+          <a:off x="0" y="0"/>
+          <a:ext cx="0" cy="0"/>
+          <a:chOff x="0" y="0"/>
+          <a:chExt cx="0" cy="0"/>
+        </a:xfrm>
+      </p:grpSpPr>
+      <p:sp>
+        <p:nvSpPr>
+          <p:cNvPr id="2" name="Titre 1"/>
+          <p:cNvSpPr>
+            <a:spLocks noGrp="1"/>
+          </p:cNvSpPr>
+          <p:nvPr>
+            <p:ph type="title"/>
+          </p:nvPr>
+        </p:nvSpPr>
+        <p:spPr/>
+        <p:txBody>
+          <a:bodyPr/>
+          <a:lstStyle/>
+          <a:p>
+            <a:r>
+              <a:rPr lang="fr-FR" dirty="0"/>
+              <a:t>Cas non gaussien</a:t>
+            </a:r>
+          </a:p>
+        </p:txBody>
+      </p:sp>
+      <p:sp>
+        <p:nvSpPr>
+          <p:cNvPr id="3" name="Espace réservé du contenu 2"/>
+          <p:cNvSpPr>
+            <a:spLocks noGrp="1"/>
+          </p:cNvSpPr>
+          <p:nvPr>
+            <p:ph idx="1"/>
+          </p:nvPr>
+        </p:nvSpPr>
+        <p:spPr/>
+        <p:txBody>
+          <a:bodyPr/>
+          <a:lstStyle/>
+          <a:p>
+            <a:r>
+              <a:rPr lang="fr-FR" dirty="0"/>
+              <a:t>Les distribution des salaire en France ne suit pas une gaussienne</a:t>
+            </a:r>
+          </a:p>
+          <a:p>
+            <a:pPr lvl="1"/>
+            <a:r>
+              <a:rPr lang="fr-FR" dirty="0"/>
+              <a:t>C’est une gaussienne asymétrique</a:t>
+            </a:r>
+          </a:p>
+          <a:p>
+            <a:r>
+              <a:rPr lang="fr-FR" dirty="0"/>
+              <a:t>La moyenne et l’écart type n’ont pas de sens</a:t>
+            </a:r>
+          </a:p>
+          <a:p>
+            <a:r>
+              <a:rPr lang="fr-FR" dirty="0"/>
+              <a:t>Il faut utilise la médiane et les *iles</a:t>
+            </a:r>
+          </a:p>
+          <a:p>
+            <a:r>
+              <a:rPr lang="fr-FR" dirty="0"/>
+              <a:t>Exemple</a:t>
+            </a:r>
+          </a:p>
+          <a:p>
+            <a:pPr lvl="1"/>
+            <a:r>
+              <a:rPr lang="fr-FR" dirty="0"/>
+              <a:t>Salaire équivalent temps plein net</a:t>
+            </a:r>
+          </a:p>
+          <a:p>
+            <a:pPr lvl="1"/>
+            <a:r>
+              <a:rPr lang="fr-FR" dirty="0"/>
+              <a:t>Salaire moyen : 2250 €</a:t>
+            </a:r>
+          </a:p>
+          <a:p>
+            <a:pPr lvl="1"/>
+            <a:r>
+              <a:rPr lang="fr-FR" dirty="0"/>
+              <a:t>Salaire médian : 1797 €</a:t>
+            </a:r>
+          </a:p>
+          <a:p>
+            <a:pPr lvl="1"/>
+            <a:endParaRPr lang="fr-FR" dirty="0"/>
+          </a:p>
+        </p:txBody>
+      </p:sp>
+      <p:pic>
+        <p:nvPicPr>
+          <p:cNvPr id="5122" name="Picture 2" descr="Résultat de recherche d'images pour &quot;distribution des salaires en france&quot;"/>
+          <p:cNvPicPr>
+            <a:picLocks noChangeAspect="1" noChangeArrowheads="1"/>
+          </p:cNvPicPr>
+          <p:nvPr/>
+        </p:nvPicPr>
+        <p:blipFill>
+          <a:blip r:embed="rId2" cstate="print">
+            <a:extLst>
+              <a:ext uri="{28A0092B-C50C-407E-A947-70E740481C1C}">
+                <a14:useLocalDpi xmlns:a14="http://schemas.microsoft.com/office/drawing/2010/main" val="0"/>
+              </a:ext>
+            </a:extLst>
+          </a:blip>
+          <a:srcRect/>
+          <a:stretch>
+            <a:fillRect/>
+          </a:stretch>
+        </p:blipFill>
+        <p:spPr bwMode="auto">
+          <a:xfrm>
+            <a:off x="5657864" y="3789040"/>
+            <a:ext cx="3367370" cy="2262577"/>
+          </a:xfrm>
+          <a:prstGeom prst="rect">
+            <a:avLst/>
+          </a:prstGeom>
+          <a:noFill/>
+          <a:extLst>
+            <a:ext uri="{909E8E84-426E-40DD-AFC4-6F175D3DCCD1}">
+              <a14:hiddenFill xmlns:a14="http://schemas.microsoft.com/office/drawing/2010/main">
+                <a:solidFill>
+                  <a:srgbClr val="FFFFFF"/>
+                </a:solidFill>
+              </a14:hiddenFill>
+            </a:ext>
+          </a:extLst>
+        </p:spPr>
+      </p:pic>
+    </p:spTree>
+    <p:extLst>
+      <p:ext uri="{BB962C8B-B14F-4D97-AF65-F5344CB8AC3E}">
+        <p14:creationId xmlns:p14="http://schemas.microsoft.com/office/powerpoint/2010/main" val="4195433927"/>
+      </p:ext>
+    </p:extLst>
+  </p:cSld>
+  <p:clrMapOvr>
+    <a:masterClrMapping/>
+  </p:clrMapOvr>
+</p:sld>
+</file>
+
+<file path=ppt/slides/slide25.xml><?xml version="1.0" encoding="utf-8"?>
+<p:sld xmlns:a="http://schemas.openxmlformats.org/drawingml/2006/main" xmlns:r="http://schemas.openxmlformats.org/officeDocument/2006/relationships" xmlns:p="http://schemas.openxmlformats.org/presentationml/2006/main">
+  <p:cSld>
+    <p:spTree>
+      <p:nvGrpSpPr>
+        <p:cNvPr id="1" name=""/>
+        <p:cNvGrpSpPr/>
+        <p:nvPr/>
+      </p:nvGrpSpPr>
+      <p:grpSpPr>
+        <a:xfrm>
+          <a:off x="0" y="0"/>
+          <a:ext cx="0" cy="0"/>
+          <a:chOff x="0" y="0"/>
+          <a:chExt cx="0" cy="0"/>
+        </a:xfrm>
+      </p:grpSpPr>
+      <p:sp>
+        <p:nvSpPr>
+          <p:cNvPr id="2" name="Titre 1"/>
+          <p:cNvSpPr>
+            <a:spLocks noGrp="1"/>
+          </p:cNvSpPr>
+          <p:nvPr>
+            <p:ph type="title"/>
+          </p:nvPr>
+        </p:nvSpPr>
+        <p:spPr/>
+        <p:txBody>
+          <a:bodyPr/>
+          <a:lstStyle/>
+          <a:p>
+            <a:r>
+              <a:rPr lang="fr-FR" dirty="0"/>
+              <a:t>Modélisation</a:t>
+            </a:r>
+          </a:p>
+        </p:txBody>
+      </p:sp>
+      <p:sp>
+        <p:nvSpPr>
+          <p:cNvPr id="3" name="Espace réservé du contenu 2"/>
+          <p:cNvSpPr>
+            <a:spLocks noGrp="1"/>
+          </p:cNvSpPr>
+          <p:nvPr>
+            <p:ph idx="1"/>
+          </p:nvPr>
+        </p:nvSpPr>
+        <p:spPr/>
+        <p:txBody>
+          <a:bodyPr/>
+          <a:lstStyle/>
+          <a:p>
+            <a:r>
+              <a:rPr lang="fr-FR" dirty="0"/>
+              <a:t>Imaginez que vous êtes un data </a:t>
+            </a:r>
+            <a:r>
+              <a:rPr lang="fr-FR" dirty="0" err="1"/>
+              <a:t>scientist</a:t>
+            </a:r>
+            <a:endParaRPr lang="fr-FR" dirty="0"/>
+          </a:p>
+          <a:p>
+            <a:pPr lvl="1"/>
+            <a:r>
+              <a:rPr lang="fr-FR" dirty="0"/>
+              <a:t>Vous êtes maintenant confortable avec l'ensemble des données récupérées pour vos analyses</a:t>
+            </a:r>
+          </a:p>
+          <a:p>
+            <a:pPr lvl="1"/>
+            <a:r>
+              <a:rPr lang="fr-FR" dirty="0"/>
+              <a:t>Vous avez une connaissance des objectifs principaux de l'entreprise, ce qui vous a aidé à synthétiser les différentes variables qui interviennent, ainsi que visualiser les différents comportements et corrélations présents au sein de ces données</a:t>
+            </a:r>
+          </a:p>
+        </p:txBody>
+      </p:sp>
+    </p:spTree>
+    <p:extLst>
+      <p:ext uri="{BB962C8B-B14F-4D97-AF65-F5344CB8AC3E}">
+        <p14:creationId xmlns:p14="http://schemas.microsoft.com/office/powerpoint/2010/main" val="1213284648"/>
+      </p:ext>
+    </p:extLst>
+  </p:cSld>
+  <p:clrMapOvr>
+    <a:masterClrMapping/>
+  </p:clrMapOvr>
+</p:sld>
+</file>
+
+<file path=ppt/slides/slide26.xml><?xml version="1.0" encoding="utf-8"?>
+<p:sld xmlns:a="http://schemas.openxmlformats.org/drawingml/2006/main" xmlns:r="http://schemas.openxmlformats.org/officeDocument/2006/relationships" xmlns:p="http://schemas.openxmlformats.org/presentationml/2006/main">
+  <p:cSld>
+    <p:spTree>
+      <p:nvGrpSpPr>
+        <p:cNvPr id="1" name=""/>
+        <p:cNvGrpSpPr/>
+        <p:nvPr/>
+      </p:nvGrpSpPr>
+      <p:grpSpPr>
+        <a:xfrm>
+          <a:off x="0" y="0"/>
+          <a:ext cx="0" cy="0"/>
+          <a:chOff x="0" y="0"/>
+          <a:chExt cx="0" cy="0"/>
+        </a:xfrm>
+      </p:grpSpPr>
+      <p:sp>
+        <p:nvSpPr>
+          <p:cNvPr id="2" name="Titre 1"/>
+          <p:cNvSpPr>
+            <a:spLocks noGrp="1"/>
+          </p:cNvSpPr>
+          <p:nvPr>
+            <p:ph type="title"/>
+          </p:nvPr>
+        </p:nvSpPr>
+        <p:spPr/>
+        <p:txBody>
+          <a:bodyPr/>
+          <a:lstStyle/>
+          <a:p>
+            <a:r>
+              <a:rPr lang="fr-FR" dirty="0"/>
+              <a:t>Apprentissage</a:t>
+            </a:r>
+          </a:p>
+        </p:txBody>
+      </p:sp>
+      <p:sp>
+        <p:nvSpPr>
+          <p:cNvPr id="3" name="Espace réservé du contenu 2"/>
+          <p:cNvSpPr>
+            <a:spLocks noGrp="1"/>
+          </p:cNvSpPr>
+          <p:nvPr>
+            <p:ph idx="1"/>
+          </p:nvPr>
+        </p:nvSpPr>
+        <p:spPr/>
+        <p:txBody>
+          <a:bodyPr/>
+          <a:lstStyle/>
+          <a:p>
+            <a:r>
+              <a:rPr lang="fr-FR" dirty="0"/>
+              <a:t>En machine </a:t>
+            </a:r>
+            <a:r>
+              <a:rPr lang="fr-FR" dirty="0" err="1"/>
+              <a:t>learning</a:t>
+            </a:r>
+            <a:r>
+              <a:rPr lang="fr-FR" dirty="0"/>
+              <a:t>, l'idée est que l'algorithme construise une "représentation interne" tout seul afin de pouvoir effectuer la tâche qui lui est demandée (prédiction, identification, </a:t>
+            </a:r>
+            <a:r>
+              <a:rPr lang="fr-FR" dirty="0" err="1"/>
+              <a:t>etc</a:t>
+            </a:r>
+            <a:r>
+              <a:rPr lang="fr-FR" dirty="0"/>
+              <a:t>)</a:t>
+            </a:r>
+          </a:p>
+          <a:p>
+            <a:r>
+              <a:rPr lang="fr-FR" dirty="0"/>
+              <a:t>L’être humain est quasiment incapable d’écrire l’algorithme</a:t>
+            </a:r>
+          </a:p>
+          <a:p>
+            <a:r>
+              <a:rPr lang="fr-FR" dirty="0"/>
+              <a:t>Pour cela, il va d'abord falloir lui entrer un jeu de données d'exemples afin qu'il puisse s'entraîner et s'améliorer, d'où le mot apprentissage</a:t>
+            </a:r>
+          </a:p>
+          <a:p>
+            <a:r>
+              <a:rPr lang="fr-FR" dirty="0"/>
+              <a:t>Ce jeu de données s'appelle le training set</a:t>
+            </a:r>
+          </a:p>
+          <a:p>
+            <a:endParaRPr lang="fr-FR" dirty="0"/>
+          </a:p>
+        </p:txBody>
+      </p:sp>
+    </p:spTree>
+    <p:extLst>
+      <p:ext uri="{BB962C8B-B14F-4D97-AF65-F5344CB8AC3E}">
+        <p14:creationId xmlns:p14="http://schemas.microsoft.com/office/powerpoint/2010/main" val="1896891291"/>
+      </p:ext>
+    </p:extLst>
+  </p:cSld>
+  <p:clrMapOvr>
+    <a:masterClrMapping/>
+  </p:clrMapOvr>
+</p:sld>
+</file>
+
+<file path=ppt/slides/slide27.xml><?xml version="1.0" encoding="utf-8"?>
+<p:sld xmlns:a="http://schemas.openxmlformats.org/drawingml/2006/main" xmlns:r="http://schemas.openxmlformats.org/officeDocument/2006/relationships" xmlns:p="http://schemas.openxmlformats.org/presentationml/2006/main">
+  <p:cSld>
+    <p:spTree>
+      <p:nvGrpSpPr>
+        <p:cNvPr id="1" name=""/>
+        <p:cNvGrpSpPr/>
+        <p:nvPr/>
+      </p:nvGrpSpPr>
+      <p:grpSpPr>
+        <a:xfrm>
+          <a:off x="0" y="0"/>
+          <a:ext cx="0" cy="0"/>
+          <a:chOff x="0" y="0"/>
+          <a:chExt cx="0" cy="0"/>
+        </a:xfrm>
+      </p:grpSpPr>
+      <p:sp>
+        <p:nvSpPr>
+          <p:cNvPr id="2" name="Titre 1"/>
+          <p:cNvSpPr>
+            <a:spLocks noGrp="1"/>
+          </p:cNvSpPr>
+          <p:nvPr>
+            <p:ph type="title"/>
+          </p:nvPr>
+        </p:nvSpPr>
+        <p:spPr/>
+        <p:txBody>
+          <a:bodyPr/>
+          <a:lstStyle/>
+          <a:p>
+            <a:r>
+              <a:rPr lang="fr-FR" dirty="0"/>
+              <a:t>Machine Learning </a:t>
+            </a:r>
+            <a:r>
+              <a:rPr lang="fr-FR"/>
+              <a:t>vs Programmation</a:t>
+            </a:r>
+            <a:endParaRPr lang="fr-FR" dirty="0"/>
+          </a:p>
+        </p:txBody>
+      </p:sp>
+      <p:pic>
+        <p:nvPicPr>
+          <p:cNvPr id="1026" name="Picture 2" descr="https://dpzbhybb2pdcj.cloudfront.net/allaire/Figures/01fig02.jpg"/>
+          <p:cNvPicPr>
+            <a:picLocks noChangeAspect="1" noChangeArrowheads="1"/>
+          </p:cNvPicPr>
+          <p:nvPr/>
+        </p:nvPicPr>
+        <p:blipFill>
+          <a:blip r:embed="rId2">
+            <a:extLst>
+              <a:ext uri="{28A0092B-C50C-407E-A947-70E740481C1C}">
+                <a14:useLocalDpi xmlns:a14="http://schemas.microsoft.com/office/drawing/2010/main" val="0"/>
+              </a:ext>
+            </a:extLst>
+          </a:blip>
+          <a:srcRect/>
+          <a:stretch>
+            <a:fillRect/>
+          </a:stretch>
+        </p:blipFill>
+        <p:spPr bwMode="auto">
+          <a:xfrm>
+            <a:off x="1979712" y="2420888"/>
+            <a:ext cx="6048672" cy="3069477"/>
+          </a:xfrm>
+          <a:prstGeom prst="rect">
+            <a:avLst/>
+          </a:prstGeom>
+          <a:noFill/>
+          <a:extLst>
+            <a:ext uri="{909E8E84-426E-40DD-AFC4-6F175D3DCCD1}">
+              <a14:hiddenFill xmlns:a14="http://schemas.microsoft.com/office/drawing/2010/main">
+                <a:solidFill>
+                  <a:srgbClr val="FFFFFF"/>
+                </a:solidFill>
+              </a14:hiddenFill>
+            </a:ext>
+          </a:extLst>
+        </p:spPr>
+      </p:pic>
+    </p:spTree>
+    <p:extLst>
+      <p:ext uri="{BB962C8B-B14F-4D97-AF65-F5344CB8AC3E}">
+        <p14:creationId xmlns:p14="http://schemas.microsoft.com/office/powerpoint/2010/main" val="89981574"/>
+      </p:ext>
+    </p:extLst>
+  </p:cSld>
+  <p:clrMapOvr>
+    <a:masterClrMapping/>
+  </p:clrMapOvr>
+</p:sld>
+</file>
+
+<file path=ppt/slides/slide28.xml><?xml version="1.0" encoding="utf-8"?>
+<p:sld xmlns:a="http://schemas.openxmlformats.org/drawingml/2006/main" xmlns:r="http://schemas.openxmlformats.org/officeDocument/2006/relationships" xmlns:p="http://schemas.openxmlformats.org/presentationml/2006/main">
+  <p:cSld>
+    <p:spTree>
+      <p:nvGrpSpPr>
+        <p:cNvPr id="1" name=""/>
+        <p:cNvGrpSpPr/>
+        <p:nvPr/>
+      </p:nvGrpSpPr>
+      <p:grpSpPr>
+        <a:xfrm>
+          <a:off x="0" y="0"/>
+          <a:ext cx="0" cy="0"/>
+          <a:chOff x="0" y="0"/>
+          <a:chExt cx="0" cy="0"/>
+        </a:xfrm>
+      </p:grpSpPr>
+      <p:sp>
+        <p:nvSpPr>
+          <p:cNvPr id="2" name="Titre 1"/>
+          <p:cNvSpPr>
+            <a:spLocks noGrp="1"/>
+          </p:cNvSpPr>
+          <p:nvPr>
+            <p:ph type="title"/>
+          </p:nvPr>
+        </p:nvSpPr>
+        <p:spPr/>
+        <p:txBody>
+          <a:bodyPr/>
+          <a:lstStyle/>
+          <a:p>
+            <a:r>
+              <a:rPr lang="fr-FR" dirty="0"/>
+              <a:t>Exemple</a:t>
+            </a:r>
+          </a:p>
+        </p:txBody>
+      </p:sp>
+      <p:pic>
+        <p:nvPicPr>
+          <p:cNvPr id="6146" name="Picture 2" descr="Un exemple de jeu de données classique (appelé CIFAR-10) qui permet d'entraîner un modèle de machine learning"/>
+          <p:cNvPicPr>
+            <a:picLocks noGrp="1" noChangeAspect="1" noChangeArrowheads="1"/>
+          </p:cNvPicPr>
+          <p:nvPr>
+            <p:ph idx="1"/>
+          </p:nvPr>
+        </p:nvPicPr>
+        <p:blipFill>
+          <a:blip r:embed="rId2">
+            <a:extLst>
+              <a:ext uri="{28A0092B-C50C-407E-A947-70E740481C1C}">
+                <a14:useLocalDpi xmlns:a14="http://schemas.microsoft.com/office/drawing/2010/main" val="0"/>
+              </a:ext>
+            </a:extLst>
+          </a:blip>
+          <a:srcRect/>
+          <a:stretch>
+            <a:fillRect/>
+          </a:stretch>
+        </p:blipFill>
+        <p:spPr bwMode="auto">
+          <a:xfrm>
+            <a:off x="970716" y="1156209"/>
+            <a:ext cx="6697627" cy="5177997"/>
+          </a:xfrm>
+          <a:prstGeom prst="rect">
+            <a:avLst/>
+          </a:prstGeom>
+          <a:noFill/>
+          <a:extLst>
+            <a:ext uri="{909E8E84-426E-40DD-AFC4-6F175D3DCCD1}">
+              <a14:hiddenFill xmlns:a14="http://schemas.microsoft.com/office/drawing/2010/main">
+                <a:solidFill>
+                  <a:srgbClr val="FFFFFF"/>
+                </a:solidFill>
+              </a14:hiddenFill>
+            </a:ext>
+          </a:extLst>
+        </p:spPr>
+      </p:pic>
+    </p:spTree>
+    <p:extLst>
+      <p:ext uri="{BB962C8B-B14F-4D97-AF65-F5344CB8AC3E}">
+        <p14:creationId xmlns:p14="http://schemas.microsoft.com/office/powerpoint/2010/main" val="3094425722"/>
+      </p:ext>
+    </p:extLst>
+  </p:cSld>
+  <p:clrMapOvr>
+    <a:masterClrMapping/>
+  </p:clrMapOvr>
+</p:sld>
+</file>
+
+<file path=ppt/slides/slide29.xml><?xml version="1.0" encoding="utf-8"?>
+<p:sld xmlns:a="http://schemas.openxmlformats.org/drawingml/2006/main" xmlns:r="http://schemas.openxmlformats.org/officeDocument/2006/relationships" xmlns:p="http://schemas.openxmlformats.org/presentationml/2006/main">
+  <p:cSld>
+    <p:spTree>
+      <p:nvGrpSpPr>
+        <p:cNvPr id="1" name=""/>
+        <p:cNvGrpSpPr/>
+        <p:nvPr/>
+      </p:nvGrpSpPr>
+      <p:grpSpPr>
+        <a:xfrm>
+          <a:off x="0" y="0"/>
+          <a:ext cx="0" cy="0"/>
+          <a:chOff x="0" y="0"/>
+          <a:chExt cx="0" cy="0"/>
+        </a:xfrm>
+      </p:grpSpPr>
+      <p:sp>
+        <p:nvSpPr>
+          <p:cNvPr id="2" name="Titre 1"/>
+          <p:cNvSpPr>
+            <a:spLocks noGrp="1"/>
+          </p:cNvSpPr>
+          <p:nvPr>
+            <p:ph type="title"/>
+          </p:nvPr>
+        </p:nvSpPr>
+        <p:spPr/>
+        <p:txBody>
+          <a:bodyPr/>
+          <a:lstStyle/>
+          <a:p>
+            <a:r>
+              <a:rPr lang="fr-FR" dirty="0"/>
+              <a:t>Workflow</a:t>
+            </a:r>
+          </a:p>
+        </p:txBody>
+      </p:sp>
+      <p:pic>
+        <p:nvPicPr>
+          <p:cNvPr id="7170" name="Picture 2" descr="Un détail de des deux phases du process de machine learning."/>
+          <p:cNvPicPr>
+            <a:picLocks noGrp="1" noChangeAspect="1" noChangeArrowheads="1"/>
+          </p:cNvPicPr>
+          <p:nvPr>
+            <p:ph idx="1"/>
+          </p:nvPr>
+        </p:nvPicPr>
+        <p:blipFill>
+          <a:blip r:embed="rId2">
+            <a:extLst>
+              <a:ext uri="{28A0092B-C50C-407E-A947-70E740481C1C}">
+                <a14:useLocalDpi xmlns:a14="http://schemas.microsoft.com/office/drawing/2010/main" val="0"/>
+              </a:ext>
+            </a:extLst>
+          </a:blip>
+          <a:srcRect/>
+          <a:stretch>
+            <a:fillRect/>
+          </a:stretch>
+        </p:blipFill>
+        <p:spPr bwMode="auto">
+          <a:xfrm>
+            <a:off x="1187624" y="1268760"/>
+            <a:ext cx="6902073" cy="4678809"/>
+          </a:xfrm>
+          <a:prstGeom prst="rect">
+            <a:avLst/>
+          </a:prstGeom>
+          <a:noFill/>
+          <a:extLst>
+            <a:ext uri="{909E8E84-426E-40DD-AFC4-6F175D3DCCD1}">
+              <a14:hiddenFill xmlns:a14="http://schemas.microsoft.com/office/drawing/2010/main">
+                <a:solidFill>
+                  <a:srgbClr val="FFFFFF"/>
+                </a:solidFill>
+              </a14:hiddenFill>
+            </a:ext>
+          </a:extLst>
+        </p:spPr>
+      </p:pic>
+    </p:spTree>
+    <p:extLst>
+      <p:ext uri="{BB962C8B-B14F-4D97-AF65-F5344CB8AC3E}">
+        <p14:creationId xmlns:p14="http://schemas.microsoft.com/office/powerpoint/2010/main" val="4097198819"/>
+      </p:ext>
+    </p:extLst>
+  </p:cSld>
+  <p:clrMapOvr>
+    <a:masterClrMapping/>
+  </p:clrMapOvr>
+</p:sld>
+</file>
+
+<file path=ppt/slides/slide3.xml><?xml version="1.0" encoding="utf-8"?>
 <p:sld xmlns:a="http://schemas.openxmlformats.org/drawingml/2006/main" xmlns:r="http://schemas.openxmlformats.org/officeDocument/2006/relationships" xmlns:p="http://schemas.openxmlformats.org/presentationml/2006/main">
   <p:cSld>
     <p:spTree>
@@ -5234,1204 +6529,6 @@
 </p:sld>
 </file>
 
-<file path=ppt/slides/slide20.xml><?xml version="1.0" encoding="utf-8"?>
-<p:sld xmlns:a="http://schemas.openxmlformats.org/drawingml/2006/main" xmlns:r="http://schemas.openxmlformats.org/officeDocument/2006/relationships" xmlns:p="http://schemas.openxmlformats.org/presentationml/2006/main">
-  <p:cSld>
-    <p:spTree>
-      <p:nvGrpSpPr>
-        <p:cNvPr id="1" name=""/>
-        <p:cNvGrpSpPr/>
-        <p:nvPr/>
-      </p:nvGrpSpPr>
-      <p:grpSpPr>
-        <a:xfrm>
-          <a:off x="0" y="0"/>
-          <a:ext cx="0" cy="0"/>
-          <a:chOff x="0" y="0"/>
-          <a:chExt cx="0" cy="0"/>
-        </a:xfrm>
-      </p:grpSpPr>
-      <p:sp>
-        <p:nvSpPr>
-          <p:cNvPr id="2" name="Titre 1"/>
-          <p:cNvSpPr>
-            <a:spLocks noGrp="1"/>
-          </p:cNvSpPr>
-          <p:nvPr>
-            <p:ph type="title"/>
-          </p:nvPr>
-        </p:nvSpPr>
-        <p:spPr/>
-        <p:txBody>
-          <a:bodyPr/>
-          <a:lstStyle/>
-          <a:p>
-            <a:r>
-              <a:rPr lang="fr-FR" dirty="0"/>
-              <a:t>Loi normale</a:t>
-            </a:r>
-          </a:p>
-        </p:txBody>
-      </p:sp>
-      <p:sp>
-        <p:nvSpPr>
-          <p:cNvPr id="3" name="Espace réservé du contenu 2"/>
-          <p:cNvSpPr>
-            <a:spLocks noGrp="1"/>
-          </p:cNvSpPr>
-          <p:nvPr>
-            <p:ph idx="1"/>
-          </p:nvPr>
-        </p:nvSpPr>
-        <p:spPr/>
-        <p:txBody>
-          <a:bodyPr/>
-          <a:lstStyle/>
-          <a:p>
-            <a:r>
-              <a:rPr lang="fr-FR" dirty="0"/>
-              <a:t>Il est fréquent de considérer que les valeurs se répartissent selon une courbe de Gauss</a:t>
-            </a:r>
-          </a:p>
-          <a:p>
-            <a:pPr lvl="1"/>
-            <a:r>
-              <a:rPr lang="fr-FR" dirty="0"/>
-              <a:t>Dans le cas des sciences sociales, par exemple, la moyenne et l'écart type permettent de déterminer un intervalle dans lequel on trouve une majorité de la population</a:t>
-            </a:r>
-          </a:p>
-          <a:p>
-            <a:pPr lvl="1"/>
-            <a:endParaRPr lang="fr-FR" dirty="0"/>
-          </a:p>
-        </p:txBody>
-      </p:sp>
-      <p:pic>
-        <p:nvPicPr>
-          <p:cNvPr id="4098" name="Picture 2" descr="https://upload.wikimedia.org/wikipedia/commons/thumb/8/8c/Standard_deviation_diagram.svg/400px-Standard_deviation_diagram.svg.png"/>
-          <p:cNvPicPr>
-            <a:picLocks noChangeAspect="1" noChangeArrowheads="1"/>
-          </p:cNvPicPr>
-          <p:nvPr/>
-        </p:nvPicPr>
-        <p:blipFill>
-          <a:blip r:embed="rId2">
-            <a:extLst>
-              <a:ext uri="{28A0092B-C50C-407E-A947-70E740481C1C}">
-                <a14:useLocalDpi xmlns:a14="http://schemas.microsoft.com/office/drawing/2010/main" val="0"/>
-              </a:ext>
-            </a:extLst>
-          </a:blip>
-          <a:srcRect/>
-          <a:stretch>
-            <a:fillRect/>
-          </a:stretch>
-        </p:blipFill>
-        <p:spPr bwMode="auto">
-          <a:xfrm>
-            <a:off x="2339752" y="4221088"/>
-            <a:ext cx="3810000" cy="1905000"/>
-          </a:xfrm>
-          <a:prstGeom prst="rect">
-            <a:avLst/>
-          </a:prstGeom>
-          <a:noFill/>
-          <a:extLst>
-            <a:ext uri="{909E8E84-426E-40DD-AFC4-6F175D3DCCD1}">
-              <a14:hiddenFill xmlns:a14="http://schemas.microsoft.com/office/drawing/2010/main">
-                <a:solidFill>
-                  <a:srgbClr val="FFFFFF"/>
-                </a:solidFill>
-              </a14:hiddenFill>
-            </a:ext>
-          </a:extLst>
-        </p:spPr>
-      </p:pic>
-    </p:spTree>
-    <p:extLst>
-      <p:ext uri="{BB962C8B-B14F-4D97-AF65-F5344CB8AC3E}">
-        <p14:creationId xmlns:p14="http://schemas.microsoft.com/office/powerpoint/2010/main" val="2677704954"/>
-      </p:ext>
-    </p:extLst>
-  </p:cSld>
-  <p:clrMapOvr>
-    <a:masterClrMapping/>
-  </p:clrMapOvr>
-</p:sld>
-</file>
-
-<file path=ppt/slides/slide21.xml><?xml version="1.0" encoding="utf-8"?>
-<p:sld xmlns:a="http://schemas.openxmlformats.org/drawingml/2006/main" xmlns:r="http://schemas.openxmlformats.org/officeDocument/2006/relationships" xmlns:p="http://schemas.openxmlformats.org/presentationml/2006/main">
-  <p:cSld>
-    <p:spTree>
-      <p:nvGrpSpPr>
-        <p:cNvPr id="1" name=""/>
-        <p:cNvGrpSpPr/>
-        <p:nvPr/>
-      </p:nvGrpSpPr>
-      <p:grpSpPr>
-        <a:xfrm>
-          <a:off x="0" y="0"/>
-          <a:ext cx="0" cy="0"/>
-          <a:chOff x="0" y="0"/>
-          <a:chExt cx="0" cy="0"/>
-        </a:xfrm>
-      </p:grpSpPr>
-      <p:sp>
-        <p:nvSpPr>
-          <p:cNvPr id="2" name="Titre 1"/>
-          <p:cNvSpPr>
-            <a:spLocks noGrp="1"/>
-          </p:cNvSpPr>
-          <p:nvPr>
-            <p:ph type="title"/>
-          </p:nvPr>
-        </p:nvSpPr>
-        <p:spPr/>
-        <p:txBody>
-          <a:bodyPr/>
-          <a:lstStyle/>
-          <a:p>
-            <a:r>
-              <a:rPr lang="fr-FR" dirty="0"/>
-              <a:t>Loi normale</a:t>
-            </a:r>
-          </a:p>
-        </p:txBody>
-      </p:sp>
-      <p:sp>
-        <p:nvSpPr>
-          <p:cNvPr id="3" name="Espace réservé du contenu 2"/>
-          <p:cNvSpPr>
-            <a:spLocks noGrp="1"/>
-          </p:cNvSpPr>
-          <p:nvPr>
-            <p:ph idx="1"/>
-          </p:nvPr>
-        </p:nvSpPr>
-        <p:spPr/>
-        <p:txBody>
-          <a:bodyPr/>
-          <a:lstStyle/>
-          <a:p>
-            <a:r>
-              <a:rPr lang="fr-FR" dirty="0"/>
-              <a:t>Avec le calcul de la distribution des données il est possible de filtrer les données trop éloignée de la loi normale</a:t>
-            </a:r>
-          </a:p>
-          <a:p>
-            <a:pPr lvl="1"/>
-            <a:r>
-              <a:rPr lang="fr-FR" dirty="0"/>
-              <a:t>Possibilité de filtrer les données &gt; 3 * Sigma</a:t>
-            </a:r>
-          </a:p>
-          <a:p>
-            <a:r>
-              <a:rPr lang="fr-FR" dirty="0"/>
-              <a:t>Possibilité de calculer la médiane, quartile, décile, centile</a:t>
-            </a:r>
-          </a:p>
-          <a:p>
-            <a:pPr lvl="1"/>
-            <a:endParaRPr lang="fr-FR" dirty="0"/>
-          </a:p>
-        </p:txBody>
-      </p:sp>
-    </p:spTree>
-    <p:extLst>
-      <p:ext uri="{BB962C8B-B14F-4D97-AF65-F5344CB8AC3E}">
-        <p14:creationId xmlns:p14="http://schemas.microsoft.com/office/powerpoint/2010/main" val="2894000027"/>
-      </p:ext>
-    </p:extLst>
-  </p:cSld>
-  <p:clrMapOvr>
-    <a:masterClrMapping/>
-  </p:clrMapOvr>
-</p:sld>
-</file>
-
-<file path=ppt/slides/slide22.xml><?xml version="1.0" encoding="utf-8"?>
-<p:sld xmlns:a="http://schemas.openxmlformats.org/drawingml/2006/main" xmlns:r="http://schemas.openxmlformats.org/officeDocument/2006/relationships" xmlns:p="http://schemas.openxmlformats.org/presentationml/2006/main">
-  <p:cSld>
-    <p:spTree>
-      <p:nvGrpSpPr>
-        <p:cNvPr id="1" name=""/>
-        <p:cNvGrpSpPr/>
-        <p:nvPr/>
-      </p:nvGrpSpPr>
-      <p:grpSpPr>
-        <a:xfrm>
-          <a:off x="0" y="0"/>
-          <a:ext cx="0" cy="0"/>
-          <a:chOff x="0" y="0"/>
-          <a:chExt cx="0" cy="0"/>
-        </a:xfrm>
-      </p:grpSpPr>
-      <p:sp>
-        <p:nvSpPr>
-          <p:cNvPr id="2" name="Titre 1"/>
-          <p:cNvSpPr>
-            <a:spLocks noGrp="1"/>
-          </p:cNvSpPr>
-          <p:nvPr>
-            <p:ph type="title"/>
-          </p:nvPr>
-        </p:nvSpPr>
-        <p:spPr/>
-        <p:txBody>
-          <a:bodyPr/>
-          <a:lstStyle/>
-          <a:p>
-            <a:r>
-              <a:rPr lang="fr-FR" dirty="0"/>
-              <a:t>Cas non gaussien</a:t>
-            </a:r>
-          </a:p>
-        </p:txBody>
-      </p:sp>
-      <p:sp>
-        <p:nvSpPr>
-          <p:cNvPr id="3" name="Espace réservé du contenu 2"/>
-          <p:cNvSpPr>
-            <a:spLocks noGrp="1"/>
-          </p:cNvSpPr>
-          <p:nvPr>
-            <p:ph idx="1"/>
-          </p:nvPr>
-        </p:nvSpPr>
-        <p:spPr/>
-        <p:txBody>
-          <a:bodyPr/>
-          <a:lstStyle/>
-          <a:p>
-            <a:r>
-              <a:rPr lang="fr-FR" dirty="0"/>
-              <a:t>Les distribution des salaire en France ne suit pas une gaussienne</a:t>
-            </a:r>
-          </a:p>
-          <a:p>
-            <a:pPr lvl="1"/>
-            <a:r>
-              <a:rPr lang="fr-FR" dirty="0"/>
-              <a:t>C’est une gaussienne asymétrique</a:t>
-            </a:r>
-          </a:p>
-          <a:p>
-            <a:r>
-              <a:rPr lang="fr-FR" dirty="0"/>
-              <a:t>La moyenne et l’écart type n’ont pas de sens</a:t>
-            </a:r>
-          </a:p>
-          <a:p>
-            <a:r>
-              <a:rPr lang="fr-FR" dirty="0"/>
-              <a:t>Il faut utilise la médiane et les *iles</a:t>
-            </a:r>
-          </a:p>
-          <a:p>
-            <a:r>
-              <a:rPr lang="fr-FR" dirty="0"/>
-              <a:t>Exemple</a:t>
-            </a:r>
-          </a:p>
-          <a:p>
-            <a:pPr lvl="1"/>
-            <a:r>
-              <a:rPr lang="fr-FR" dirty="0"/>
-              <a:t>Salaire équivalent temps plein net</a:t>
-            </a:r>
-          </a:p>
-          <a:p>
-            <a:pPr lvl="1"/>
-            <a:r>
-              <a:rPr lang="fr-FR" dirty="0"/>
-              <a:t>Salaire moyen : 2250 €</a:t>
-            </a:r>
-          </a:p>
-          <a:p>
-            <a:pPr lvl="1"/>
-            <a:r>
-              <a:rPr lang="fr-FR" dirty="0"/>
-              <a:t>Salaire médian : 1797 €</a:t>
-            </a:r>
-          </a:p>
-          <a:p>
-            <a:pPr lvl="1"/>
-            <a:endParaRPr lang="fr-FR" dirty="0"/>
-          </a:p>
-        </p:txBody>
-      </p:sp>
-      <p:pic>
-        <p:nvPicPr>
-          <p:cNvPr id="5122" name="Picture 2" descr="Résultat de recherche d'images pour &quot;distribution des salaires en france&quot;"/>
-          <p:cNvPicPr>
-            <a:picLocks noChangeAspect="1" noChangeArrowheads="1"/>
-          </p:cNvPicPr>
-          <p:nvPr/>
-        </p:nvPicPr>
-        <p:blipFill>
-          <a:blip r:embed="rId2" cstate="print">
-            <a:extLst>
-              <a:ext uri="{28A0092B-C50C-407E-A947-70E740481C1C}">
-                <a14:useLocalDpi xmlns:a14="http://schemas.microsoft.com/office/drawing/2010/main" val="0"/>
-              </a:ext>
-            </a:extLst>
-          </a:blip>
-          <a:srcRect/>
-          <a:stretch>
-            <a:fillRect/>
-          </a:stretch>
-        </p:blipFill>
-        <p:spPr bwMode="auto">
-          <a:xfrm>
-            <a:off x="5657864" y="3789040"/>
-            <a:ext cx="3367370" cy="2262577"/>
-          </a:xfrm>
-          <a:prstGeom prst="rect">
-            <a:avLst/>
-          </a:prstGeom>
-          <a:noFill/>
-          <a:extLst>
-            <a:ext uri="{909E8E84-426E-40DD-AFC4-6F175D3DCCD1}">
-              <a14:hiddenFill xmlns:a14="http://schemas.microsoft.com/office/drawing/2010/main">
-                <a:solidFill>
-                  <a:srgbClr val="FFFFFF"/>
-                </a:solidFill>
-              </a14:hiddenFill>
-            </a:ext>
-          </a:extLst>
-        </p:spPr>
-      </p:pic>
-    </p:spTree>
-    <p:extLst>
-      <p:ext uri="{BB962C8B-B14F-4D97-AF65-F5344CB8AC3E}">
-        <p14:creationId xmlns:p14="http://schemas.microsoft.com/office/powerpoint/2010/main" val="4195433927"/>
-      </p:ext>
-    </p:extLst>
-  </p:cSld>
-  <p:clrMapOvr>
-    <a:masterClrMapping/>
-  </p:clrMapOvr>
-</p:sld>
-</file>
-
-<file path=ppt/slides/slide23.xml><?xml version="1.0" encoding="utf-8"?>
-<p:sld xmlns:a="http://schemas.openxmlformats.org/drawingml/2006/main" xmlns:r="http://schemas.openxmlformats.org/officeDocument/2006/relationships" xmlns:p="http://schemas.openxmlformats.org/presentationml/2006/main">
-  <p:cSld>
-    <p:spTree>
-      <p:nvGrpSpPr>
-        <p:cNvPr id="1" name=""/>
-        <p:cNvGrpSpPr/>
-        <p:nvPr/>
-      </p:nvGrpSpPr>
-      <p:grpSpPr>
-        <a:xfrm>
-          <a:off x="0" y="0"/>
-          <a:ext cx="0" cy="0"/>
-          <a:chOff x="0" y="0"/>
-          <a:chExt cx="0" cy="0"/>
-        </a:xfrm>
-      </p:grpSpPr>
-      <p:sp>
-        <p:nvSpPr>
-          <p:cNvPr id="2" name="Titre 1"/>
-          <p:cNvSpPr>
-            <a:spLocks noGrp="1"/>
-          </p:cNvSpPr>
-          <p:nvPr>
-            <p:ph type="title"/>
-          </p:nvPr>
-        </p:nvSpPr>
-        <p:spPr/>
-        <p:txBody>
-          <a:bodyPr/>
-          <a:lstStyle/>
-          <a:p>
-            <a:r>
-              <a:rPr lang="fr-FR" dirty="0"/>
-              <a:t>Modélisation</a:t>
-            </a:r>
-          </a:p>
-        </p:txBody>
-      </p:sp>
-      <p:sp>
-        <p:nvSpPr>
-          <p:cNvPr id="3" name="Espace réservé du contenu 2"/>
-          <p:cNvSpPr>
-            <a:spLocks noGrp="1"/>
-          </p:cNvSpPr>
-          <p:nvPr>
-            <p:ph idx="1"/>
-          </p:nvPr>
-        </p:nvSpPr>
-        <p:spPr/>
-        <p:txBody>
-          <a:bodyPr/>
-          <a:lstStyle/>
-          <a:p>
-            <a:r>
-              <a:rPr lang="fr-FR" dirty="0"/>
-              <a:t>Imaginez que vous êtes un data </a:t>
-            </a:r>
-            <a:r>
-              <a:rPr lang="fr-FR" dirty="0" err="1"/>
-              <a:t>scientist</a:t>
-            </a:r>
-            <a:endParaRPr lang="fr-FR" dirty="0"/>
-          </a:p>
-          <a:p>
-            <a:pPr lvl="1"/>
-            <a:r>
-              <a:rPr lang="fr-FR" dirty="0"/>
-              <a:t>Vous êtes maintenant confortable avec l'ensemble des données récupérées pour vos analyses</a:t>
-            </a:r>
-          </a:p>
-          <a:p>
-            <a:pPr lvl="1"/>
-            <a:r>
-              <a:rPr lang="fr-FR" dirty="0"/>
-              <a:t>Vous avez une connaissance des objectifs principaux de l'entreprise, ce qui vous a aidé à synthétiser les différentes variables qui interviennent, ainsi que visualiser les différents comportements et corrélations présents au sein de ces données</a:t>
-            </a:r>
-          </a:p>
-        </p:txBody>
-      </p:sp>
-    </p:spTree>
-    <p:extLst>
-      <p:ext uri="{BB962C8B-B14F-4D97-AF65-F5344CB8AC3E}">
-        <p14:creationId xmlns:p14="http://schemas.microsoft.com/office/powerpoint/2010/main" val="1213284648"/>
-      </p:ext>
-    </p:extLst>
-  </p:cSld>
-  <p:clrMapOvr>
-    <a:masterClrMapping/>
-  </p:clrMapOvr>
-</p:sld>
-</file>
-
-<file path=ppt/slides/slide24.xml><?xml version="1.0" encoding="utf-8"?>
-<p:sld xmlns:a="http://schemas.openxmlformats.org/drawingml/2006/main" xmlns:r="http://schemas.openxmlformats.org/officeDocument/2006/relationships" xmlns:p="http://schemas.openxmlformats.org/presentationml/2006/main">
-  <p:cSld>
-    <p:spTree>
-      <p:nvGrpSpPr>
-        <p:cNvPr id="1" name=""/>
-        <p:cNvGrpSpPr/>
-        <p:nvPr/>
-      </p:nvGrpSpPr>
-      <p:grpSpPr>
-        <a:xfrm>
-          <a:off x="0" y="0"/>
-          <a:ext cx="0" cy="0"/>
-          <a:chOff x="0" y="0"/>
-          <a:chExt cx="0" cy="0"/>
-        </a:xfrm>
-      </p:grpSpPr>
-      <p:sp>
-        <p:nvSpPr>
-          <p:cNvPr id="2" name="Titre 1"/>
-          <p:cNvSpPr>
-            <a:spLocks noGrp="1"/>
-          </p:cNvSpPr>
-          <p:nvPr>
-            <p:ph type="title"/>
-          </p:nvPr>
-        </p:nvSpPr>
-        <p:spPr/>
-        <p:txBody>
-          <a:bodyPr/>
-          <a:lstStyle/>
-          <a:p>
-            <a:r>
-              <a:rPr lang="fr-FR" dirty="0"/>
-              <a:t>Apprentissage</a:t>
-            </a:r>
-          </a:p>
-        </p:txBody>
-      </p:sp>
-      <p:sp>
-        <p:nvSpPr>
-          <p:cNvPr id="3" name="Espace réservé du contenu 2"/>
-          <p:cNvSpPr>
-            <a:spLocks noGrp="1"/>
-          </p:cNvSpPr>
-          <p:nvPr>
-            <p:ph idx="1"/>
-          </p:nvPr>
-        </p:nvSpPr>
-        <p:spPr/>
-        <p:txBody>
-          <a:bodyPr/>
-          <a:lstStyle/>
-          <a:p>
-            <a:r>
-              <a:rPr lang="fr-FR" dirty="0"/>
-              <a:t>En machine </a:t>
-            </a:r>
-            <a:r>
-              <a:rPr lang="fr-FR" dirty="0" err="1"/>
-              <a:t>learning</a:t>
-            </a:r>
-            <a:r>
-              <a:rPr lang="fr-FR" dirty="0"/>
-              <a:t>, l'idée est que l'algorithme construise une "représentation interne" tout seul afin de pouvoir effectuer la tâche qui lui est demandée (prédiction, identification, </a:t>
-            </a:r>
-            <a:r>
-              <a:rPr lang="fr-FR" dirty="0" err="1"/>
-              <a:t>etc</a:t>
-            </a:r>
-            <a:r>
-              <a:rPr lang="fr-FR" dirty="0"/>
-              <a:t>)</a:t>
-            </a:r>
-          </a:p>
-          <a:p>
-            <a:r>
-              <a:rPr lang="fr-FR" dirty="0"/>
-              <a:t>L’être humain est quasiment incapable d’écrire l’algorithme</a:t>
-            </a:r>
-          </a:p>
-          <a:p>
-            <a:r>
-              <a:rPr lang="fr-FR" dirty="0"/>
-              <a:t>Pour cela, il va d'abord falloir lui entrer un jeu de données d'exemples afin qu'il puisse s'entraîner et s'améliorer, d'où le mot apprentissage</a:t>
-            </a:r>
-          </a:p>
-          <a:p>
-            <a:r>
-              <a:rPr lang="fr-FR" dirty="0"/>
-              <a:t>Ce jeu de données s'appelle le training set</a:t>
-            </a:r>
-          </a:p>
-          <a:p>
-            <a:endParaRPr lang="fr-FR" dirty="0"/>
-          </a:p>
-        </p:txBody>
-      </p:sp>
-    </p:spTree>
-    <p:extLst>
-      <p:ext uri="{BB962C8B-B14F-4D97-AF65-F5344CB8AC3E}">
-        <p14:creationId xmlns:p14="http://schemas.microsoft.com/office/powerpoint/2010/main" val="1896891291"/>
-      </p:ext>
-    </p:extLst>
-  </p:cSld>
-  <p:clrMapOvr>
-    <a:masterClrMapping/>
-  </p:clrMapOvr>
-</p:sld>
-</file>
-
-<file path=ppt/slides/slide25.xml><?xml version="1.0" encoding="utf-8"?>
-<p:sld xmlns:a="http://schemas.openxmlformats.org/drawingml/2006/main" xmlns:r="http://schemas.openxmlformats.org/officeDocument/2006/relationships" xmlns:p="http://schemas.openxmlformats.org/presentationml/2006/main">
-  <p:cSld>
-    <p:spTree>
-      <p:nvGrpSpPr>
-        <p:cNvPr id="1" name=""/>
-        <p:cNvGrpSpPr/>
-        <p:nvPr/>
-      </p:nvGrpSpPr>
-      <p:grpSpPr>
-        <a:xfrm>
-          <a:off x="0" y="0"/>
-          <a:ext cx="0" cy="0"/>
-          <a:chOff x="0" y="0"/>
-          <a:chExt cx="0" cy="0"/>
-        </a:xfrm>
-      </p:grpSpPr>
-      <p:sp>
-        <p:nvSpPr>
-          <p:cNvPr id="2" name="Titre 1"/>
-          <p:cNvSpPr>
-            <a:spLocks noGrp="1"/>
-          </p:cNvSpPr>
-          <p:nvPr>
-            <p:ph type="title"/>
-          </p:nvPr>
-        </p:nvSpPr>
-        <p:spPr/>
-        <p:txBody>
-          <a:bodyPr/>
-          <a:lstStyle/>
-          <a:p>
-            <a:r>
-              <a:rPr lang="fr-FR" dirty="0"/>
-              <a:t>Machine Learning </a:t>
-            </a:r>
-            <a:r>
-              <a:rPr lang="fr-FR"/>
-              <a:t>vs Programmation</a:t>
-            </a:r>
-            <a:endParaRPr lang="fr-FR" dirty="0"/>
-          </a:p>
-        </p:txBody>
-      </p:sp>
-      <p:pic>
-        <p:nvPicPr>
-          <p:cNvPr id="1026" name="Picture 2" descr="https://dpzbhybb2pdcj.cloudfront.net/allaire/Figures/01fig02.jpg"/>
-          <p:cNvPicPr>
-            <a:picLocks noChangeAspect="1" noChangeArrowheads="1"/>
-          </p:cNvPicPr>
-          <p:nvPr/>
-        </p:nvPicPr>
-        <p:blipFill>
-          <a:blip r:embed="rId2">
-            <a:extLst>
-              <a:ext uri="{28A0092B-C50C-407E-A947-70E740481C1C}">
-                <a14:useLocalDpi xmlns:a14="http://schemas.microsoft.com/office/drawing/2010/main" val="0"/>
-              </a:ext>
-            </a:extLst>
-          </a:blip>
-          <a:srcRect/>
-          <a:stretch>
-            <a:fillRect/>
-          </a:stretch>
-        </p:blipFill>
-        <p:spPr bwMode="auto">
-          <a:xfrm>
-            <a:off x="1979712" y="2420888"/>
-            <a:ext cx="6048672" cy="3069477"/>
-          </a:xfrm>
-          <a:prstGeom prst="rect">
-            <a:avLst/>
-          </a:prstGeom>
-          <a:noFill/>
-          <a:extLst>
-            <a:ext uri="{909E8E84-426E-40DD-AFC4-6F175D3DCCD1}">
-              <a14:hiddenFill xmlns:a14="http://schemas.microsoft.com/office/drawing/2010/main">
-                <a:solidFill>
-                  <a:srgbClr val="FFFFFF"/>
-                </a:solidFill>
-              </a14:hiddenFill>
-            </a:ext>
-          </a:extLst>
-        </p:spPr>
-      </p:pic>
-    </p:spTree>
-    <p:extLst>
-      <p:ext uri="{BB962C8B-B14F-4D97-AF65-F5344CB8AC3E}">
-        <p14:creationId xmlns:p14="http://schemas.microsoft.com/office/powerpoint/2010/main" val="89981574"/>
-      </p:ext>
-    </p:extLst>
-  </p:cSld>
-  <p:clrMapOvr>
-    <a:masterClrMapping/>
-  </p:clrMapOvr>
-</p:sld>
-</file>
-
-<file path=ppt/slides/slide26.xml><?xml version="1.0" encoding="utf-8"?>
-<p:sld xmlns:a="http://schemas.openxmlformats.org/drawingml/2006/main" xmlns:r="http://schemas.openxmlformats.org/officeDocument/2006/relationships" xmlns:p="http://schemas.openxmlformats.org/presentationml/2006/main">
-  <p:cSld>
-    <p:spTree>
-      <p:nvGrpSpPr>
-        <p:cNvPr id="1" name=""/>
-        <p:cNvGrpSpPr/>
-        <p:nvPr/>
-      </p:nvGrpSpPr>
-      <p:grpSpPr>
-        <a:xfrm>
-          <a:off x="0" y="0"/>
-          <a:ext cx="0" cy="0"/>
-          <a:chOff x="0" y="0"/>
-          <a:chExt cx="0" cy="0"/>
-        </a:xfrm>
-      </p:grpSpPr>
-      <p:sp>
-        <p:nvSpPr>
-          <p:cNvPr id="2" name="Titre 1"/>
-          <p:cNvSpPr>
-            <a:spLocks noGrp="1"/>
-          </p:cNvSpPr>
-          <p:nvPr>
-            <p:ph type="title"/>
-          </p:nvPr>
-        </p:nvSpPr>
-        <p:spPr/>
-        <p:txBody>
-          <a:bodyPr/>
-          <a:lstStyle/>
-          <a:p>
-            <a:r>
-              <a:rPr lang="fr-FR" dirty="0"/>
-              <a:t>Exemple</a:t>
-            </a:r>
-          </a:p>
-        </p:txBody>
-      </p:sp>
-      <p:pic>
-        <p:nvPicPr>
-          <p:cNvPr id="6146" name="Picture 2" descr="Un exemple de jeu de données classique (appelé CIFAR-10) qui permet d'entraîner un modèle de machine learning"/>
-          <p:cNvPicPr>
-            <a:picLocks noGrp="1" noChangeAspect="1" noChangeArrowheads="1"/>
-          </p:cNvPicPr>
-          <p:nvPr>
-            <p:ph idx="1"/>
-          </p:nvPr>
-        </p:nvPicPr>
-        <p:blipFill>
-          <a:blip r:embed="rId2">
-            <a:extLst>
-              <a:ext uri="{28A0092B-C50C-407E-A947-70E740481C1C}">
-                <a14:useLocalDpi xmlns:a14="http://schemas.microsoft.com/office/drawing/2010/main" val="0"/>
-              </a:ext>
-            </a:extLst>
-          </a:blip>
-          <a:srcRect/>
-          <a:stretch>
-            <a:fillRect/>
-          </a:stretch>
-        </p:blipFill>
-        <p:spPr bwMode="auto">
-          <a:xfrm>
-            <a:off x="970716" y="1156209"/>
-            <a:ext cx="6697627" cy="5177997"/>
-          </a:xfrm>
-          <a:prstGeom prst="rect">
-            <a:avLst/>
-          </a:prstGeom>
-          <a:noFill/>
-          <a:extLst>
-            <a:ext uri="{909E8E84-426E-40DD-AFC4-6F175D3DCCD1}">
-              <a14:hiddenFill xmlns:a14="http://schemas.microsoft.com/office/drawing/2010/main">
-                <a:solidFill>
-                  <a:srgbClr val="FFFFFF"/>
-                </a:solidFill>
-              </a14:hiddenFill>
-            </a:ext>
-          </a:extLst>
-        </p:spPr>
-      </p:pic>
-    </p:spTree>
-    <p:extLst>
-      <p:ext uri="{BB962C8B-B14F-4D97-AF65-F5344CB8AC3E}">
-        <p14:creationId xmlns:p14="http://schemas.microsoft.com/office/powerpoint/2010/main" val="3094425722"/>
-      </p:ext>
-    </p:extLst>
-  </p:cSld>
-  <p:clrMapOvr>
-    <a:masterClrMapping/>
-  </p:clrMapOvr>
-</p:sld>
-</file>
-
-<file path=ppt/slides/slide27.xml><?xml version="1.0" encoding="utf-8"?>
-<p:sld xmlns:a="http://schemas.openxmlformats.org/drawingml/2006/main" xmlns:r="http://schemas.openxmlformats.org/officeDocument/2006/relationships" xmlns:p="http://schemas.openxmlformats.org/presentationml/2006/main">
-  <p:cSld>
-    <p:spTree>
-      <p:nvGrpSpPr>
-        <p:cNvPr id="1" name=""/>
-        <p:cNvGrpSpPr/>
-        <p:nvPr/>
-      </p:nvGrpSpPr>
-      <p:grpSpPr>
-        <a:xfrm>
-          <a:off x="0" y="0"/>
-          <a:ext cx="0" cy="0"/>
-          <a:chOff x="0" y="0"/>
-          <a:chExt cx="0" cy="0"/>
-        </a:xfrm>
-      </p:grpSpPr>
-      <p:sp>
-        <p:nvSpPr>
-          <p:cNvPr id="2" name="Titre 1"/>
-          <p:cNvSpPr>
-            <a:spLocks noGrp="1"/>
-          </p:cNvSpPr>
-          <p:nvPr>
-            <p:ph type="title"/>
-          </p:nvPr>
-        </p:nvSpPr>
-        <p:spPr/>
-        <p:txBody>
-          <a:bodyPr/>
-          <a:lstStyle/>
-          <a:p>
-            <a:r>
-              <a:rPr lang="fr-FR" dirty="0"/>
-              <a:t>Workflow</a:t>
-            </a:r>
-          </a:p>
-        </p:txBody>
-      </p:sp>
-      <p:pic>
-        <p:nvPicPr>
-          <p:cNvPr id="7170" name="Picture 2" descr="Un détail de des deux phases du process de machine learning."/>
-          <p:cNvPicPr>
-            <a:picLocks noGrp="1" noChangeAspect="1" noChangeArrowheads="1"/>
-          </p:cNvPicPr>
-          <p:nvPr>
-            <p:ph idx="1"/>
-          </p:nvPr>
-        </p:nvPicPr>
-        <p:blipFill>
-          <a:blip r:embed="rId2">
-            <a:extLst>
-              <a:ext uri="{28A0092B-C50C-407E-A947-70E740481C1C}">
-                <a14:useLocalDpi xmlns:a14="http://schemas.microsoft.com/office/drawing/2010/main" val="0"/>
-              </a:ext>
-            </a:extLst>
-          </a:blip>
-          <a:srcRect/>
-          <a:stretch>
-            <a:fillRect/>
-          </a:stretch>
-        </p:blipFill>
-        <p:spPr bwMode="auto">
-          <a:xfrm>
-            <a:off x="1187624" y="1268760"/>
-            <a:ext cx="6902073" cy="4678809"/>
-          </a:xfrm>
-          <a:prstGeom prst="rect">
-            <a:avLst/>
-          </a:prstGeom>
-          <a:noFill/>
-          <a:extLst>
-            <a:ext uri="{909E8E84-426E-40DD-AFC4-6F175D3DCCD1}">
-              <a14:hiddenFill xmlns:a14="http://schemas.microsoft.com/office/drawing/2010/main">
-                <a:solidFill>
-                  <a:srgbClr val="FFFFFF"/>
-                </a:solidFill>
-              </a14:hiddenFill>
-            </a:ext>
-          </a:extLst>
-        </p:spPr>
-      </p:pic>
-    </p:spTree>
-    <p:extLst>
-      <p:ext uri="{BB962C8B-B14F-4D97-AF65-F5344CB8AC3E}">
-        <p14:creationId xmlns:p14="http://schemas.microsoft.com/office/powerpoint/2010/main" val="4097198819"/>
-      </p:ext>
-    </p:extLst>
-  </p:cSld>
-  <p:clrMapOvr>
-    <a:masterClrMapping/>
-  </p:clrMapOvr>
-</p:sld>
-</file>
-
-<file path=ppt/slides/slide28.xml><?xml version="1.0" encoding="utf-8"?>
-<p:sld xmlns:a="http://schemas.openxmlformats.org/drawingml/2006/main" xmlns:r="http://schemas.openxmlformats.org/officeDocument/2006/relationships" xmlns:p="http://schemas.openxmlformats.org/presentationml/2006/main">
-  <p:cSld>
-    <p:spTree>
-      <p:nvGrpSpPr>
-        <p:cNvPr id="1" name=""/>
-        <p:cNvGrpSpPr/>
-        <p:nvPr/>
-      </p:nvGrpSpPr>
-      <p:grpSpPr>
-        <a:xfrm>
-          <a:off x="0" y="0"/>
-          <a:ext cx="0" cy="0"/>
-          <a:chOff x="0" y="0"/>
-          <a:chExt cx="0" cy="0"/>
-        </a:xfrm>
-      </p:grpSpPr>
-      <p:sp>
-        <p:nvSpPr>
-          <p:cNvPr id="2" name="Titre 1"/>
-          <p:cNvSpPr>
-            <a:spLocks noGrp="1"/>
-          </p:cNvSpPr>
-          <p:nvPr>
-            <p:ph type="title"/>
-          </p:nvPr>
-        </p:nvSpPr>
-        <p:spPr/>
-        <p:txBody>
-          <a:bodyPr/>
-          <a:lstStyle/>
-          <a:p>
-            <a:r>
-              <a:rPr lang="fr-FR" dirty="0"/>
-              <a:t>Notre travail</a:t>
-            </a:r>
-          </a:p>
-        </p:txBody>
-      </p:sp>
-      <p:sp>
-        <p:nvSpPr>
-          <p:cNvPr id="3" name="Espace réservé du contenu 2"/>
-          <p:cNvSpPr>
-            <a:spLocks noGrp="1"/>
-          </p:cNvSpPr>
-          <p:nvPr>
-            <p:ph idx="1"/>
-          </p:nvPr>
-        </p:nvSpPr>
-        <p:spPr/>
-        <p:txBody>
-          <a:bodyPr/>
-          <a:lstStyle/>
-          <a:p>
-            <a:r>
-              <a:rPr lang="fr-FR" dirty="0"/>
-              <a:t>Le travail du data </a:t>
-            </a:r>
-            <a:r>
-              <a:rPr lang="fr-FR" dirty="0" err="1"/>
-              <a:t>scientist</a:t>
-            </a:r>
-            <a:r>
-              <a:rPr lang="fr-FR" dirty="0"/>
-              <a:t> en machine </a:t>
-            </a:r>
-            <a:r>
-              <a:rPr lang="fr-FR" dirty="0" err="1"/>
-              <a:t>learning</a:t>
-            </a:r>
-            <a:r>
-              <a:rPr lang="fr-FR" dirty="0"/>
-              <a:t> consiste à sélectionner les bonnes données test, choisir et entraîner le bon algorithme en vérifiant grâce à l'analyse d'erreurs que le modèle devient de plus en plus performant et robuste</a:t>
-            </a:r>
-          </a:p>
-          <a:p>
-            <a:r>
-              <a:rPr lang="fr-FR" dirty="0"/>
-              <a:t>Si les performances s'améliorent lorsqu'on lui fourni les données d'entraînement, on dit alors que la machine "apprend".</a:t>
-            </a:r>
-          </a:p>
-          <a:p>
-            <a:r>
-              <a:rPr lang="fr-FR" dirty="0"/>
-              <a:t>Le data </a:t>
-            </a:r>
-            <a:r>
-              <a:rPr lang="fr-FR" dirty="0" err="1"/>
-              <a:t>scientist</a:t>
-            </a:r>
-            <a:r>
-              <a:rPr lang="fr-FR" dirty="0"/>
-              <a:t> peut ensuite déployer le modèle afin qu'il traite de nouvelles données, pour accomplir la tâche (prédiction</a:t>
-            </a:r>
-            <a:r>
-              <a:rPr lang="fr-FR"/>
-              <a:t>, décision, ...).</a:t>
-            </a:r>
-            <a:endParaRPr lang="fr-FR" dirty="0"/>
-          </a:p>
-        </p:txBody>
-      </p:sp>
-    </p:spTree>
-    <p:extLst>
-      <p:ext uri="{BB962C8B-B14F-4D97-AF65-F5344CB8AC3E}">
-        <p14:creationId xmlns:p14="http://schemas.microsoft.com/office/powerpoint/2010/main" val="2335869725"/>
-      </p:ext>
-    </p:extLst>
-  </p:cSld>
-  <p:clrMapOvr>
-    <a:masterClrMapping/>
-  </p:clrMapOvr>
-</p:sld>
-</file>
-
-<file path=ppt/slides/slide29.xml><?xml version="1.0" encoding="utf-8"?>
-<p:sld xmlns:a="http://schemas.openxmlformats.org/drawingml/2006/main" xmlns:r="http://schemas.openxmlformats.org/officeDocument/2006/relationships" xmlns:p="http://schemas.openxmlformats.org/presentationml/2006/main">
-  <p:cSld>
-    <p:spTree>
-      <p:nvGrpSpPr>
-        <p:cNvPr id="1" name=""/>
-        <p:cNvGrpSpPr/>
-        <p:nvPr/>
-      </p:nvGrpSpPr>
-      <p:grpSpPr>
-        <a:xfrm>
-          <a:off x="0" y="0"/>
-          <a:ext cx="0" cy="0"/>
-          <a:chOff x="0" y="0"/>
-          <a:chExt cx="0" cy="0"/>
-        </a:xfrm>
-      </p:grpSpPr>
-      <p:sp>
-        <p:nvSpPr>
-          <p:cNvPr id="2" name="Titre 1"/>
-          <p:cNvSpPr>
-            <a:spLocks noGrp="1"/>
-          </p:cNvSpPr>
-          <p:nvPr>
-            <p:ph type="title"/>
-          </p:nvPr>
-        </p:nvSpPr>
-        <p:spPr/>
-        <p:txBody>
-          <a:bodyPr/>
-          <a:lstStyle/>
-          <a:p>
-            <a:r>
-              <a:rPr lang="fr-FR" dirty="0"/>
-              <a:t>L'algorithme d'apprentissage</a:t>
-            </a:r>
-          </a:p>
-        </p:txBody>
-      </p:sp>
-      <p:sp>
-        <p:nvSpPr>
-          <p:cNvPr id="3" name="Espace réservé du contenu 2"/>
-          <p:cNvSpPr>
-            <a:spLocks noGrp="1"/>
-          </p:cNvSpPr>
-          <p:nvPr>
-            <p:ph idx="1"/>
-          </p:nvPr>
-        </p:nvSpPr>
-        <p:spPr/>
-        <p:txBody>
-          <a:bodyPr/>
-          <a:lstStyle/>
-          <a:p>
-            <a:r>
-              <a:rPr lang="fr-FR" dirty="0"/>
-              <a:t>L'algorithme d'apprentissage constitue la méthode avec laquelle le modèle statistique va se paramétrer à partir des données d'exemple</a:t>
-            </a:r>
-          </a:p>
-          <a:p>
-            <a:pPr lvl="1"/>
-            <a:r>
-              <a:rPr lang="fr-FR" dirty="0"/>
-              <a:t>Il existe de nombreux algorithmes différents !</a:t>
-            </a:r>
-          </a:p>
-          <a:p>
-            <a:pPr lvl="1"/>
-            <a:r>
-              <a:rPr lang="fr-FR" dirty="0"/>
-              <a:t>On choisira un type d'algorithme particulier en fonction du type de tâche que l'on souhaite accomplir et du type de données dont on dispose</a:t>
-            </a:r>
-          </a:p>
-        </p:txBody>
-      </p:sp>
-    </p:spTree>
-    <p:extLst>
-      <p:ext uri="{BB962C8B-B14F-4D97-AF65-F5344CB8AC3E}">
-        <p14:creationId xmlns:p14="http://schemas.microsoft.com/office/powerpoint/2010/main" val="1834491022"/>
-      </p:ext>
-    </p:extLst>
-  </p:cSld>
-  <p:clrMapOvr>
-    <a:masterClrMapping/>
-  </p:clrMapOvr>
-</p:sld>
-</file>
-
-<file path=ppt/slides/slide3.xml><?xml version="1.0" encoding="utf-8"?>
-<p:sld xmlns:a="http://schemas.openxmlformats.org/drawingml/2006/main" xmlns:r="http://schemas.openxmlformats.org/officeDocument/2006/relationships" xmlns:p="http://schemas.openxmlformats.org/presentationml/2006/main">
-  <p:cSld>
-    <p:spTree>
-      <p:nvGrpSpPr>
-        <p:cNvPr id="1" name=""/>
-        <p:cNvGrpSpPr/>
-        <p:nvPr/>
-      </p:nvGrpSpPr>
-      <p:grpSpPr>
-        <a:xfrm>
-          <a:off x="0" y="0"/>
-          <a:ext cx="0" cy="0"/>
-          <a:chOff x="0" y="0"/>
-          <a:chExt cx="0" cy="0"/>
-        </a:xfrm>
-      </p:grpSpPr>
-      <p:sp>
-        <p:nvSpPr>
-          <p:cNvPr id="2" name="Titre 1"/>
-          <p:cNvSpPr>
-            <a:spLocks noGrp="1"/>
-          </p:cNvSpPr>
-          <p:nvPr>
-            <p:ph type="title"/>
-          </p:nvPr>
-        </p:nvSpPr>
-        <p:spPr/>
-        <p:txBody>
-          <a:bodyPr/>
-          <a:lstStyle/>
-          <a:p>
-            <a:r>
-              <a:rPr lang="fr-FR" dirty="0"/>
-              <a:t>1</a:t>
-            </a:r>
-            <a:r>
-              <a:rPr lang="fr-FR" baseline="30000" dirty="0"/>
-              <a:t>ère</a:t>
-            </a:r>
-            <a:r>
-              <a:rPr lang="fr-FR" dirty="0"/>
-              <a:t> étape</a:t>
-            </a:r>
-          </a:p>
-        </p:txBody>
-      </p:sp>
-      <p:sp>
-        <p:nvSpPr>
-          <p:cNvPr id="3" name="Espace réservé du contenu 2"/>
-          <p:cNvSpPr>
-            <a:spLocks noGrp="1"/>
-          </p:cNvSpPr>
-          <p:nvPr>
-            <p:ph idx="1"/>
-          </p:nvPr>
-        </p:nvSpPr>
-        <p:spPr/>
-        <p:txBody>
-          <a:bodyPr/>
-          <a:lstStyle/>
-          <a:p>
-            <a:r>
-              <a:rPr lang="fr-FR" dirty="0"/>
-              <a:t>Trouver les données</a:t>
-            </a:r>
-          </a:p>
-          <a:p>
-            <a:pPr lvl="1"/>
-            <a:r>
-              <a:rPr lang="fr-FR" dirty="0"/>
-              <a:t>Mise à disposition d’un data </a:t>
-            </a:r>
-            <a:r>
-              <a:rPr lang="fr-FR" dirty="0" err="1"/>
-              <a:t>lake</a:t>
-            </a:r>
-            <a:r>
-              <a:rPr lang="fr-FR" dirty="0"/>
-              <a:t> ou d’un data </a:t>
-            </a:r>
-            <a:r>
-              <a:rPr lang="fr-FR" dirty="0" err="1"/>
-              <a:t>mart</a:t>
-            </a:r>
-            <a:endParaRPr lang="fr-FR" dirty="0"/>
-          </a:p>
-          <a:p>
-            <a:r>
-              <a:rPr lang="fr-FR" dirty="0"/>
-              <a:t>Le jeu de données utilisé en machine </a:t>
-            </a:r>
-            <a:r>
-              <a:rPr lang="fr-FR" dirty="0" err="1"/>
-              <a:t>learning</a:t>
-            </a:r>
-            <a:r>
-              <a:rPr lang="fr-FR" dirty="0"/>
-              <a:t> s’appel le </a:t>
-            </a:r>
-            <a:r>
-              <a:rPr lang="fr-FR" dirty="0" err="1"/>
-              <a:t>Dataset</a:t>
-            </a:r>
-            <a:endParaRPr lang="fr-FR" dirty="0"/>
-          </a:p>
-        </p:txBody>
-      </p:sp>
-    </p:spTree>
-    <p:extLst>
-      <p:ext uri="{BB962C8B-B14F-4D97-AF65-F5344CB8AC3E}">
-        <p14:creationId xmlns:p14="http://schemas.microsoft.com/office/powerpoint/2010/main" val="1841075970"/>
-      </p:ext>
-    </p:extLst>
-  </p:cSld>
-  <p:clrMapOvr>
-    <a:masterClrMapping/>
-  </p:clrMapOvr>
-</p:sld>
-</file>
-
 <file path=ppt/slides/slide30.xml><?xml version="1.0" encoding="utf-8"?>
 <p:sld xmlns:a="http://schemas.openxmlformats.org/drawingml/2006/main" xmlns:r="http://schemas.openxmlformats.org/officeDocument/2006/relationships" xmlns:p="http://schemas.openxmlformats.org/presentationml/2006/main">
   <p:cSld>
@@ -6466,7 +6563,7 @@
           <a:p>
             <a:r>
               <a:rPr lang="fr-FR" dirty="0"/>
-              <a:t>Exemples</a:t>
+              <a:t>Notre travail</a:t>
             </a:r>
           </a:p>
         </p:txBody>
@@ -6488,7 +6585,15 @@
           <a:p>
             <a:r>
               <a:rPr lang="fr-FR" dirty="0"/>
-              <a:t>Quelques exemples d'algorithmes de machine </a:t>
+              <a:t>Le travail du data </a:t>
+            </a:r>
+            <a:r>
+              <a:rPr lang="fr-FR" dirty="0" err="1"/>
+              <a:t>scientist</a:t>
+            </a:r>
+            <a:r>
+              <a:rPr lang="fr-FR" dirty="0"/>
+              <a:t> en machine </a:t>
             </a:r>
             <a:r>
               <a:rPr lang="fr-FR" dirty="0" err="1"/>
@@ -6496,79 +6601,40 @@
             </a:r>
             <a:r>
               <a:rPr lang="fr-FR" dirty="0"/>
-              <a:t>, dont vous avez peut-être déjà entendu parler :</a:t>
-            </a:r>
-          </a:p>
-          <a:p>
-            <a:pPr lvl="1"/>
-            <a:r>
-              <a:rPr lang="fr-FR" dirty="0"/>
-              <a:t>La régression linéaire</a:t>
-            </a:r>
-          </a:p>
-          <a:p>
-            <a:pPr lvl="1"/>
+              <a:t> consiste à sélectionner les bonnes données test, choisir et entraîner le bon algorithme en vérifiant grâce à l'analyse d'erreurs que le modèle devient de plus en plus performant et robuste</a:t>
+            </a:r>
+          </a:p>
+          <a:p>
+            <a:r>
+              <a:rPr lang="fr-FR" dirty="0"/>
+              <a:t>Si les performances s'améliorent lorsqu'on lui fourni les données d'entraînement, on dit alors que la machine "apprend".</a:t>
+            </a:r>
+          </a:p>
+          <a:p>
+            <a:r>
+              <a:rPr lang="fr-FR" dirty="0"/>
+              <a:t>Le data </a:t>
+            </a:r>
             <a:r>
               <a:rPr lang="fr-FR" dirty="0" err="1"/>
-              <a:t>K-nn</a:t>
+              <a:t>scientist</a:t>
+            </a:r>
+            <a:r>
+              <a:rPr lang="fr-FR" dirty="0"/>
+              <a:t> peut ensuite déployer le modèle afin qu'il traite de nouvelles données, pour accomplir la tâche (prédiction</a:t>
+            </a:r>
+            <a:r>
+              <a:rPr lang="fr-FR"/>
+              <a:t>, décision, ...).</a:t>
             </a:r>
             <a:endParaRPr lang="fr-FR" dirty="0"/>
-          </a:p>
-          <a:p>
-            <a:pPr lvl="1"/>
-            <a:r>
-              <a:rPr lang="fr-FR" dirty="0"/>
-              <a:t>Les Support </a:t>
-            </a:r>
-            <a:r>
-              <a:rPr lang="fr-FR" dirty="0" err="1"/>
-              <a:t>Vector</a:t>
-            </a:r>
-            <a:r>
-              <a:rPr lang="fr-FR" dirty="0"/>
-              <a:t> Machine (SVM)</a:t>
-            </a:r>
-          </a:p>
-          <a:p>
-            <a:pPr lvl="1"/>
-            <a:r>
-              <a:rPr lang="fr-FR" dirty="0"/>
-              <a:t>Les réseaux de neurones</a:t>
-            </a:r>
-          </a:p>
-          <a:p>
-            <a:pPr lvl="1"/>
-            <a:r>
-              <a:rPr lang="fr-FR" dirty="0"/>
-              <a:t>Les </a:t>
-            </a:r>
-            <a:r>
-              <a:rPr lang="fr-FR" dirty="0" err="1"/>
-              <a:t>random</a:t>
-            </a:r>
-            <a:r>
-              <a:rPr lang="fr-FR" dirty="0"/>
-              <a:t> </a:t>
-            </a:r>
-            <a:r>
-              <a:rPr lang="fr-FR" dirty="0" err="1"/>
-              <a:t>forests</a:t>
-            </a:r>
-            <a:endParaRPr lang="fr-FR" dirty="0"/>
-          </a:p>
-          <a:p>
-            <a:pPr lvl="1"/>
-            <a:r>
-              <a:rPr lang="fr-FR" dirty="0"/>
-              <a:t>etc.</a:t>
-            </a:r>
           </a:p>
         </p:txBody>
       </p:sp>
     </p:spTree>
     <p:extLst>
       <p:ext uri="{BB962C8B-B14F-4D97-AF65-F5344CB8AC3E}">
-        <p14:creationId xmlns:p14="http://schemas.microsoft.com/office/powerpoint/2010/main" val="4152399014"/>
+        <p14:creationId xmlns:p14="http://schemas.microsoft.com/office/powerpoint/2010/main" val="2335869725"/>
       </p:ext>
     </p:extLst>
   </p:cSld>
@@ -6612,7 +6678,7 @@
           <a:p>
             <a:r>
               <a:rPr lang="fr-FR" dirty="0"/>
-              <a:t>Mesure de performance</a:t>
+              <a:t>L'algorithme d'apprentissage</a:t>
             </a:r>
           </a:p>
         </p:txBody>
@@ -6634,18 +6700,29 @@
           <a:p>
             <a:r>
               <a:rPr lang="fr-FR" dirty="0"/>
-              <a:t>Mesurer les performances fait partie intégrante du travail de modélisation. Il faut en général déterminer une mesure principale, souvent spécifique à la tâche à accomplir</a:t>
-            </a:r>
-          </a:p>
-          <a:p>
-            <a:endParaRPr lang="fr-FR" dirty="0"/>
+              <a:t>L'algorithme d'apprentissage constitue la méthode avec laquelle le modèle statistique va se paramétrer à partir des données d'exemple</a:t>
+            </a:r>
+          </a:p>
+          <a:p>
+            <a:pPr lvl="1"/>
+            <a:r>
+              <a:rPr lang="fr-FR" dirty="0"/>
+              <a:t>Il existe de nombreux algorithmes différents !</a:t>
+            </a:r>
+          </a:p>
+          <a:p>
+            <a:pPr lvl="1"/>
+            <a:r>
+              <a:rPr lang="fr-FR" dirty="0"/>
+              <a:t>On choisira un type d'algorithme particulier en fonction du type de tâche que l'on souhaite accomplir et du type de données dont on dispose</a:t>
+            </a:r>
           </a:p>
         </p:txBody>
       </p:sp>
     </p:spTree>
     <p:extLst>
       <p:ext uri="{BB962C8B-B14F-4D97-AF65-F5344CB8AC3E}">
-        <p14:creationId xmlns:p14="http://schemas.microsoft.com/office/powerpoint/2010/main" val="1973774351"/>
+        <p14:creationId xmlns:p14="http://schemas.microsoft.com/office/powerpoint/2010/main" val="1834491022"/>
       </p:ext>
     </p:extLst>
   </p:cSld>
@@ -6689,7 +6766,7 @@
           <a:p>
             <a:r>
               <a:rPr lang="fr-FR" dirty="0"/>
-              <a:t>Exemple</a:t>
+              <a:t>Exemples</a:t>
             </a:r>
           </a:p>
         </p:txBody>
@@ -6710,49 +6787,80 @@
           <a:lstStyle/>
           <a:p>
             <a:r>
-              <a:rPr lang="fr-FR" sz="2400" dirty="0"/>
-              <a:t>Imaginez que vous voulez créer un algorithme de détection de fraudes bancaires</a:t>
+              <a:rPr lang="fr-FR" dirty="0"/>
+              <a:t>Quelques exemples d'algorithmes de machine </a:t>
+            </a:r>
+            <a:r>
+              <a:rPr lang="fr-FR" dirty="0" err="1"/>
+              <a:t>learning</a:t>
+            </a:r>
+            <a:r>
+              <a:rPr lang="fr-FR" dirty="0"/>
+              <a:t>, dont vous avez peut-être déjà entendu parler :</a:t>
             </a:r>
           </a:p>
           <a:p>
             <a:pPr lvl="1"/>
             <a:r>
-              <a:rPr lang="fr-FR" sz="2000" dirty="0"/>
-              <a:t>Vous voulez mesurer à quel point votre programme est performant</a:t>
-            </a:r>
-          </a:p>
-          <a:p>
-            <a:r>
-              <a:rPr lang="fr-FR" sz="2400" dirty="0"/>
-              <a:t>Une manière de faire serait de mesurer la proportion totale de transaction détectées comme fraude</a:t>
+              <a:rPr lang="fr-FR" dirty="0"/>
+              <a:t>La régression linéaire</a:t>
             </a:r>
           </a:p>
           <a:p>
             <a:pPr lvl="1"/>
             <a:r>
-              <a:rPr lang="fr-FR" sz="2000" dirty="0"/>
-              <a:t>Cependant, on compte ici les transactions qui ne sont pas des fraudes et qui ont quand même été notées comme en étant (appelé "faux positifs")</a:t>
-            </a:r>
+              <a:rPr lang="fr-FR" dirty="0" err="1"/>
+              <a:t>K-nn</a:t>
+            </a:r>
+            <a:endParaRPr lang="fr-FR" dirty="0"/>
           </a:p>
           <a:p>
             <a:pPr lvl="1"/>
             <a:r>
-              <a:rPr lang="fr-FR" sz="2000" dirty="0"/>
-              <a:t>Donc, avec ce genre de métriques, on est pas exigeant sur ce type d'erreur que produit notre algorithme</a:t>
-            </a:r>
-          </a:p>
-          <a:p>
-            <a:r>
-              <a:rPr lang="fr-FR" sz="2400" dirty="0"/>
-              <a:t>Il faut peut être, utiliser une autre métrique plus pertinente. Par exemple, la précision qui est la proportion de "vraies fraudes" détectées par rapport au total de transactions </a:t>
-            </a:r>
-            <a:r>
-              <a:rPr lang="fr-FR" sz="2400" dirty="0" err="1"/>
-              <a:t>flagées</a:t>
-            </a:r>
-            <a:r>
-              <a:rPr lang="fr-FR" sz="2400" dirty="0"/>
-              <a:t> comme fraudes</a:t>
+              <a:rPr lang="fr-FR" dirty="0"/>
+              <a:t>Les Support </a:t>
+            </a:r>
+            <a:r>
+              <a:rPr lang="fr-FR" dirty="0" err="1"/>
+              <a:t>Vector</a:t>
+            </a:r>
+            <a:r>
+              <a:rPr lang="fr-FR" dirty="0"/>
+              <a:t> Machine (SVM)</a:t>
+            </a:r>
+          </a:p>
+          <a:p>
+            <a:pPr lvl="1"/>
+            <a:r>
+              <a:rPr lang="fr-FR" dirty="0"/>
+              <a:t>Les réseaux de neurones</a:t>
+            </a:r>
+          </a:p>
+          <a:p>
+            <a:pPr lvl="1"/>
+            <a:r>
+              <a:rPr lang="fr-FR" dirty="0"/>
+              <a:t>Les </a:t>
+            </a:r>
+            <a:r>
+              <a:rPr lang="fr-FR" dirty="0" err="1"/>
+              <a:t>random</a:t>
+            </a:r>
+            <a:r>
+              <a:rPr lang="fr-FR" dirty="0"/>
+              <a:t> </a:t>
+            </a:r>
+            <a:r>
+              <a:rPr lang="fr-FR" dirty="0" err="1"/>
+              <a:t>forests</a:t>
+            </a:r>
+            <a:endParaRPr lang="fr-FR" dirty="0"/>
+          </a:p>
+          <a:p>
+            <a:pPr lvl="1"/>
+            <a:r>
+              <a:rPr lang="fr-FR" dirty="0"/>
+              <a:t>etc.</a:t>
             </a:r>
           </a:p>
         </p:txBody>
@@ -6760,7 +6868,7 @@
     </p:spTree>
     <p:extLst>
       <p:ext uri="{BB962C8B-B14F-4D97-AF65-F5344CB8AC3E}">
-        <p14:creationId xmlns:p14="http://schemas.microsoft.com/office/powerpoint/2010/main" val="1447999638"/>
+        <p14:creationId xmlns:p14="http://schemas.microsoft.com/office/powerpoint/2010/main" val="4152399014"/>
       </p:ext>
     </p:extLst>
   </p:cSld>
@@ -6804,7 +6912,7 @@
           <a:p>
             <a:r>
               <a:rPr lang="fr-FR" dirty="0"/>
-              <a:t>Autre exemple</a:t>
+              <a:t>Mesure de performance</a:t>
             </a:r>
           </a:p>
         </p:txBody>
@@ -6826,21 +6934,18 @@
           <a:p>
             <a:r>
               <a:rPr lang="fr-FR" dirty="0"/>
-              <a:t>Dans la détection de maladie comme la méningite le nombre de faux positif n’est pas très important</a:t>
-            </a:r>
-          </a:p>
-          <a:p>
-            <a:r>
-              <a:rPr lang="fr-FR" dirty="0"/>
-              <a:t>Alors que le nombre de faux négatif est potentiellement mortel</a:t>
-            </a:r>
+              <a:t>Mesurer les performances fait partie intégrante du travail de modélisation. Il faut en général déterminer une mesure principale, souvent spécifique à la tâche à accomplir</a:t>
+            </a:r>
+          </a:p>
+          <a:p>
+            <a:endParaRPr lang="fr-FR" dirty="0"/>
           </a:p>
         </p:txBody>
       </p:sp>
     </p:spTree>
     <p:extLst>
       <p:ext uri="{BB962C8B-B14F-4D97-AF65-F5344CB8AC3E}">
-        <p14:creationId xmlns:p14="http://schemas.microsoft.com/office/powerpoint/2010/main" val="989672997"/>
+        <p14:creationId xmlns:p14="http://schemas.microsoft.com/office/powerpoint/2010/main" val="1973774351"/>
       </p:ext>
     </p:extLst>
   </p:cSld>
@@ -6884,7 +6989,7 @@
           <a:p>
             <a:r>
               <a:rPr lang="fr-FR" dirty="0"/>
-              <a:t>Problème de la recommandation</a:t>
+              <a:t>Exemple</a:t>
             </a:r>
           </a:p>
         </p:txBody>
@@ -6906,81 +7011,48 @@
           <a:p>
             <a:r>
               <a:rPr lang="fr-FR" sz="2400" dirty="0"/>
-              <a:t>La recommandation est une problématique qui revient très souvent pour les data </a:t>
+              <a:t>Imaginez que vous voulez créer un algorithme de détection de fraudes bancaires</a:t>
+            </a:r>
+          </a:p>
+          <a:p>
+            <a:pPr lvl="1"/>
+            <a:r>
+              <a:rPr lang="fr-FR" sz="2000" dirty="0"/>
+              <a:t>Vous voulez mesurer à quel point votre programme est performant</a:t>
+            </a:r>
+          </a:p>
+          <a:p>
+            <a:r>
+              <a:rPr lang="fr-FR" sz="2400" dirty="0"/>
+              <a:t>Une manière de faire serait de mesurer la proportion totale de transaction détectées comme fraude</a:t>
+            </a:r>
+          </a:p>
+          <a:p>
+            <a:pPr lvl="1"/>
+            <a:r>
+              <a:rPr lang="fr-FR" sz="2000" dirty="0"/>
+              <a:t>Cependant, on compte ici les transactions qui ne sont pas des fraudes et qui ont quand même été notées comme en étant (appelé "faux positifs")</a:t>
+            </a:r>
+          </a:p>
+          <a:p>
+            <a:pPr lvl="1"/>
+            <a:r>
+              <a:rPr lang="fr-FR" sz="2000" dirty="0"/>
+              <a:t>Donc, avec ce genre de métriques, on est pas exigeant sur ce type d'erreur que produit notre algorithme</a:t>
+            </a:r>
+          </a:p>
+          <a:p>
+            <a:r>
+              <a:rPr lang="fr-FR" sz="2400" dirty="0"/>
+              <a:t>Il faut peut être, utiliser une autre métrique plus pertinente. Par exemple, la précision qui est la proportion de "vraies fraudes" détectées par rapport au total de transactions </a:t>
             </a:r>
             <a:r>
               <a:rPr lang="fr-FR" sz="2400" dirty="0" err="1"/>
-              <a:t>scientists</a:t>
-            </a:r>
-            <a:endParaRPr lang="fr-FR" sz="2400" dirty="0"/>
-          </a:p>
-          <a:p>
+              <a:t>flagées</a:t>
+            </a:r>
             <a:r>
               <a:rPr lang="fr-FR" sz="2400" dirty="0"/>
-              <a:t>Suggérer d'autres produits à acheter sur Amazon, des films à regarder sur </a:t>
-            </a:r>
-            <a:r>
-              <a:rPr lang="fr-FR" sz="2400" dirty="0" err="1"/>
-              <a:t>Netflix</a:t>
-            </a:r>
-            <a:r>
-              <a:rPr lang="fr-FR" sz="2400" dirty="0"/>
-              <a:t>, des musiques à écouter sur </a:t>
-            </a:r>
-            <a:r>
-              <a:rPr lang="fr-FR" sz="2400" dirty="0" err="1"/>
-              <a:t>Spotify</a:t>
-            </a:r>
-            <a:r>
-              <a:rPr lang="fr-FR" sz="2400" dirty="0"/>
-              <a:t>, </a:t>
-            </a:r>
-            <a:r>
-              <a:rPr lang="fr-FR" sz="2400" dirty="0" err="1"/>
-              <a:t>etc</a:t>
-            </a:r>
-            <a:endParaRPr lang="fr-FR" sz="2400" dirty="0"/>
-          </a:p>
-          <a:p>
-            <a:pPr lvl="1"/>
-            <a:r>
-              <a:rPr lang="fr-FR" sz="2000" dirty="0"/>
-              <a:t>La recommandation </a:t>
-            </a:r>
-            <a:r>
-              <a:rPr lang="fr-FR" sz="2000" dirty="0" err="1"/>
-              <a:t>Spotify</a:t>
-            </a:r>
-            <a:r>
-              <a:rPr lang="fr-FR" sz="2000" dirty="0"/>
-              <a:t> est en Python</a:t>
-            </a:r>
-          </a:p>
-          <a:p>
-            <a:r>
-              <a:rPr lang="fr-FR" sz="2400" dirty="0"/>
-              <a:t>Mais du coup c'est de la classification ? de la régression ? supervisé ? non-supervisé ?</a:t>
-            </a:r>
-          </a:p>
-          <a:p>
-            <a:r>
-              <a:rPr lang="fr-FR" sz="2400" dirty="0"/>
-              <a:t> Une technique largement répandue est le "collaborative </a:t>
-            </a:r>
-            <a:r>
-              <a:rPr lang="fr-FR" sz="2400" dirty="0" err="1"/>
-              <a:t>filtering</a:t>
-            </a:r>
-            <a:r>
-              <a:rPr lang="fr-FR" sz="2400" dirty="0"/>
-              <a:t>", qui se base sur des similarités</a:t>
-            </a:r>
-          </a:p>
-          <a:p>
-            <a:pPr lvl="1"/>
-            <a:r>
-              <a:rPr lang="fr-FR" sz="2000" dirty="0"/>
-              <a:t>c'est un problème non-supervisé</a:t>
+              <a:t> comme fraudes</a:t>
             </a:r>
           </a:p>
         </p:txBody>
@@ -6988,7 +7060,7 @@
     </p:spTree>
     <p:extLst>
       <p:ext uri="{BB962C8B-B14F-4D97-AF65-F5344CB8AC3E}">
-        <p14:creationId xmlns:p14="http://schemas.microsoft.com/office/powerpoint/2010/main" val="85037537"/>
+        <p14:creationId xmlns:p14="http://schemas.microsoft.com/office/powerpoint/2010/main" val="1447999638"/>
       </p:ext>
     </p:extLst>
   </p:cSld>
@@ -7032,6 +7104,234 @@
           <a:p>
             <a:r>
               <a:rPr lang="fr-FR" dirty="0"/>
+              <a:t>Autre exemple</a:t>
+            </a:r>
+          </a:p>
+        </p:txBody>
+      </p:sp>
+      <p:sp>
+        <p:nvSpPr>
+          <p:cNvPr id="3" name="Espace réservé du contenu 2"/>
+          <p:cNvSpPr>
+            <a:spLocks noGrp="1"/>
+          </p:cNvSpPr>
+          <p:nvPr>
+            <p:ph idx="1"/>
+          </p:nvPr>
+        </p:nvSpPr>
+        <p:spPr/>
+        <p:txBody>
+          <a:bodyPr/>
+          <a:lstStyle/>
+          <a:p>
+            <a:r>
+              <a:rPr lang="fr-FR" dirty="0"/>
+              <a:t>Dans la détection de maladie comme la méningite le nombre de faux positif n’est pas très important</a:t>
+            </a:r>
+          </a:p>
+          <a:p>
+            <a:r>
+              <a:rPr lang="fr-FR" dirty="0"/>
+              <a:t>Alors que le nombre de faux négatif est potentiellement mortel</a:t>
+            </a:r>
+          </a:p>
+        </p:txBody>
+      </p:sp>
+    </p:spTree>
+    <p:extLst>
+      <p:ext uri="{BB962C8B-B14F-4D97-AF65-F5344CB8AC3E}">
+        <p14:creationId xmlns:p14="http://schemas.microsoft.com/office/powerpoint/2010/main" val="989672997"/>
+      </p:ext>
+    </p:extLst>
+  </p:cSld>
+  <p:clrMapOvr>
+    <a:masterClrMapping/>
+  </p:clrMapOvr>
+</p:sld>
+</file>
+
+<file path=ppt/slides/slide36.xml><?xml version="1.0" encoding="utf-8"?>
+<p:sld xmlns:a="http://schemas.openxmlformats.org/drawingml/2006/main" xmlns:r="http://schemas.openxmlformats.org/officeDocument/2006/relationships" xmlns:p="http://schemas.openxmlformats.org/presentationml/2006/main">
+  <p:cSld>
+    <p:spTree>
+      <p:nvGrpSpPr>
+        <p:cNvPr id="1" name=""/>
+        <p:cNvGrpSpPr/>
+        <p:nvPr/>
+      </p:nvGrpSpPr>
+      <p:grpSpPr>
+        <a:xfrm>
+          <a:off x="0" y="0"/>
+          <a:ext cx="0" cy="0"/>
+          <a:chOff x="0" y="0"/>
+          <a:chExt cx="0" cy="0"/>
+        </a:xfrm>
+      </p:grpSpPr>
+      <p:sp>
+        <p:nvSpPr>
+          <p:cNvPr id="2" name="Titre 1"/>
+          <p:cNvSpPr>
+            <a:spLocks noGrp="1"/>
+          </p:cNvSpPr>
+          <p:nvPr>
+            <p:ph type="title"/>
+          </p:nvPr>
+        </p:nvSpPr>
+        <p:spPr/>
+        <p:txBody>
+          <a:bodyPr/>
+          <a:lstStyle/>
+          <a:p>
+            <a:r>
+              <a:rPr lang="fr-FR" dirty="0"/>
+              <a:t>Problème de la recommandation</a:t>
+            </a:r>
+          </a:p>
+        </p:txBody>
+      </p:sp>
+      <p:sp>
+        <p:nvSpPr>
+          <p:cNvPr id="3" name="Espace réservé du contenu 2"/>
+          <p:cNvSpPr>
+            <a:spLocks noGrp="1"/>
+          </p:cNvSpPr>
+          <p:nvPr>
+            <p:ph idx="1"/>
+          </p:nvPr>
+        </p:nvSpPr>
+        <p:spPr/>
+        <p:txBody>
+          <a:bodyPr/>
+          <a:lstStyle/>
+          <a:p>
+            <a:r>
+              <a:rPr lang="fr-FR" sz="2400" dirty="0"/>
+              <a:t>La recommandation est une problématique qui revient très souvent pour les data </a:t>
+            </a:r>
+            <a:r>
+              <a:rPr lang="fr-FR" sz="2400" dirty="0" err="1"/>
+              <a:t>scientists</a:t>
+            </a:r>
+            <a:endParaRPr lang="fr-FR" sz="2400" dirty="0"/>
+          </a:p>
+          <a:p>
+            <a:r>
+              <a:rPr lang="fr-FR" sz="2400" dirty="0"/>
+              <a:t>Suggérer d'autres produits à acheter sur Amazon, des films à regarder sur </a:t>
+            </a:r>
+            <a:r>
+              <a:rPr lang="fr-FR" sz="2400" dirty="0" err="1"/>
+              <a:t>Netflix</a:t>
+            </a:r>
+            <a:r>
+              <a:rPr lang="fr-FR" sz="2400" dirty="0"/>
+              <a:t>, des musiques à écouter sur </a:t>
+            </a:r>
+            <a:r>
+              <a:rPr lang="fr-FR" sz="2400" dirty="0" err="1"/>
+              <a:t>Spotify</a:t>
+            </a:r>
+            <a:r>
+              <a:rPr lang="fr-FR" sz="2400" dirty="0"/>
+              <a:t>, </a:t>
+            </a:r>
+            <a:r>
+              <a:rPr lang="fr-FR" sz="2400" dirty="0" err="1"/>
+              <a:t>etc</a:t>
+            </a:r>
+            <a:endParaRPr lang="fr-FR" sz="2400" dirty="0"/>
+          </a:p>
+          <a:p>
+            <a:pPr lvl="1"/>
+            <a:r>
+              <a:rPr lang="fr-FR" sz="2000" dirty="0"/>
+              <a:t>La recommandation </a:t>
+            </a:r>
+            <a:r>
+              <a:rPr lang="fr-FR" sz="2000" dirty="0" err="1"/>
+              <a:t>Spotify</a:t>
+            </a:r>
+            <a:r>
+              <a:rPr lang="fr-FR" sz="2000" dirty="0"/>
+              <a:t> est en Python</a:t>
+            </a:r>
+          </a:p>
+          <a:p>
+            <a:r>
+              <a:rPr lang="fr-FR" sz="2400" dirty="0"/>
+              <a:t>Mais du coup c'est de la classification ? de la régression ? supervisé ? non-supervisé ?</a:t>
+            </a:r>
+          </a:p>
+          <a:p>
+            <a:r>
+              <a:rPr lang="fr-FR" sz="2400" dirty="0"/>
+              <a:t> Une technique largement répandue est le "collaborative </a:t>
+            </a:r>
+            <a:r>
+              <a:rPr lang="fr-FR" sz="2400" dirty="0" err="1"/>
+              <a:t>filtering</a:t>
+            </a:r>
+            <a:r>
+              <a:rPr lang="fr-FR" sz="2400" dirty="0"/>
+              <a:t>", qui se base sur des similarités</a:t>
+            </a:r>
+          </a:p>
+          <a:p>
+            <a:pPr lvl="1"/>
+            <a:r>
+              <a:rPr lang="fr-FR" sz="2000" dirty="0"/>
+              <a:t>c'est un problème non-supervisé</a:t>
+            </a:r>
+          </a:p>
+        </p:txBody>
+      </p:sp>
+    </p:spTree>
+    <p:extLst>
+      <p:ext uri="{BB962C8B-B14F-4D97-AF65-F5344CB8AC3E}">
+        <p14:creationId xmlns:p14="http://schemas.microsoft.com/office/powerpoint/2010/main" val="85037537"/>
+      </p:ext>
+    </p:extLst>
+  </p:cSld>
+  <p:clrMapOvr>
+    <a:masterClrMapping/>
+  </p:clrMapOvr>
+</p:sld>
+</file>
+
+<file path=ppt/slides/slide37.xml><?xml version="1.0" encoding="utf-8"?>
+<p:sld xmlns:a="http://schemas.openxmlformats.org/drawingml/2006/main" xmlns:r="http://schemas.openxmlformats.org/officeDocument/2006/relationships" xmlns:p="http://schemas.openxmlformats.org/presentationml/2006/main">
+  <p:cSld>
+    <p:spTree>
+      <p:nvGrpSpPr>
+        <p:cNvPr id="1" name=""/>
+        <p:cNvGrpSpPr/>
+        <p:nvPr/>
+      </p:nvGrpSpPr>
+      <p:grpSpPr>
+        <a:xfrm>
+          <a:off x="0" y="0"/>
+          <a:ext cx="0" cy="0"/>
+          <a:chOff x="0" y="0"/>
+          <a:chExt cx="0" cy="0"/>
+        </a:xfrm>
+      </p:grpSpPr>
+      <p:sp>
+        <p:nvSpPr>
+          <p:cNvPr id="2" name="Titre 1"/>
+          <p:cNvSpPr>
+            <a:spLocks noGrp="1"/>
+          </p:cNvSpPr>
+          <p:nvPr>
+            <p:ph type="title"/>
+          </p:nvPr>
+        </p:nvSpPr>
+        <p:spPr/>
+        <p:txBody>
+          <a:bodyPr/>
+          <a:lstStyle/>
+          <a:p>
+            <a:r>
+              <a:rPr lang="fr-FR" dirty="0"/>
               <a:t>Le </a:t>
             </a:r>
             <a:r>
@@ -7097,7 +7397,7 @@
 </p:sld>
 </file>
 
-<file path=ppt/slides/slide36.xml><?xml version="1.0" encoding="utf-8"?>
+<file path=ppt/slides/slide38.xml><?xml version="1.0" encoding="utf-8"?>
 <p:sld xmlns:a="http://schemas.openxmlformats.org/drawingml/2006/main" xmlns:r="http://schemas.openxmlformats.org/officeDocument/2006/relationships" xmlns:p="http://schemas.openxmlformats.org/presentationml/2006/main">
   <p:cSld>
     <p:spTree>
@@ -7192,7 +7492,7 @@
 </p:sld>
 </file>
 
-<file path=ppt/slides/slide37.xml><?xml version="1.0" encoding="utf-8"?>
+<file path=ppt/slides/slide39.xml><?xml version="1.0" encoding="utf-8"?>
 <p:sld xmlns:a="http://schemas.openxmlformats.org/drawingml/2006/main" xmlns:r="http://schemas.openxmlformats.org/officeDocument/2006/relationships" xmlns:p="http://schemas.openxmlformats.org/presentationml/2006/main">
   <p:cSld>
     <p:spTree>
@@ -7303,7 +7603,128 @@
 </p:sld>
 </file>
 
-<file path=ppt/slides/slide38.xml><?xml version="1.0" encoding="utf-8"?>
+<file path=ppt/slides/slide4.xml><?xml version="1.0" encoding="utf-8"?>
+<p:sld xmlns:a="http://schemas.openxmlformats.org/drawingml/2006/main" xmlns:r="http://schemas.openxmlformats.org/officeDocument/2006/relationships" xmlns:p="http://schemas.openxmlformats.org/presentationml/2006/main">
+  <p:cSld>
+    <p:spTree>
+      <p:nvGrpSpPr>
+        <p:cNvPr id="1" name=""/>
+        <p:cNvGrpSpPr/>
+        <p:nvPr/>
+      </p:nvGrpSpPr>
+      <p:grpSpPr>
+        <a:xfrm>
+          <a:off x="0" y="0"/>
+          <a:ext cx="0" cy="0"/>
+          <a:chOff x="0" y="0"/>
+          <a:chExt cx="0" cy="0"/>
+        </a:xfrm>
+      </p:grpSpPr>
+      <p:sp>
+        <p:nvSpPr>
+          <p:cNvPr id="2" name="Titre 1"/>
+          <p:cNvSpPr>
+            <a:spLocks noGrp="1"/>
+          </p:cNvSpPr>
+          <p:nvPr>
+            <p:ph type="title"/>
+          </p:nvPr>
+        </p:nvSpPr>
+        <p:spPr/>
+        <p:txBody>
+          <a:bodyPr/>
+          <a:lstStyle/>
+          <a:p>
+            <a:r>
+              <a:rPr lang="fr-FR" dirty="0"/>
+              <a:t>1</a:t>
+            </a:r>
+            <a:r>
+              <a:rPr lang="fr-FR" baseline="30000" dirty="0"/>
+              <a:t>ère</a:t>
+            </a:r>
+            <a:r>
+              <a:rPr lang="fr-FR" dirty="0"/>
+              <a:t> étape</a:t>
+            </a:r>
+          </a:p>
+        </p:txBody>
+      </p:sp>
+      <p:sp>
+        <p:nvSpPr>
+          <p:cNvPr id="3" name="Espace réservé du contenu 2"/>
+          <p:cNvSpPr>
+            <a:spLocks noGrp="1"/>
+          </p:cNvSpPr>
+          <p:nvPr>
+            <p:ph idx="1"/>
+          </p:nvPr>
+        </p:nvSpPr>
+        <p:spPr/>
+        <p:txBody>
+          <a:bodyPr/>
+          <a:lstStyle/>
+          <a:p>
+            <a:r>
+              <a:rPr lang="fr-FR" dirty="0"/>
+              <a:t>Trouver les données</a:t>
+            </a:r>
+          </a:p>
+          <a:p>
+            <a:pPr lvl="1"/>
+            <a:r>
+              <a:rPr lang="fr-FR" dirty="0"/>
+              <a:t>Mise à disposition d’un data </a:t>
+            </a:r>
+            <a:r>
+              <a:rPr lang="fr-FR" dirty="0" err="1"/>
+              <a:t>lake</a:t>
+            </a:r>
+            <a:r>
+              <a:rPr lang="fr-FR" dirty="0"/>
+              <a:t> ou d’un data </a:t>
+            </a:r>
+            <a:r>
+              <a:rPr lang="fr-FR" dirty="0" err="1"/>
+              <a:t>mart</a:t>
+            </a:r>
+            <a:endParaRPr lang="fr-FR" dirty="0"/>
+          </a:p>
+          <a:p>
+            <a:r>
+              <a:rPr lang="fr-FR" dirty="0"/>
+              <a:t>Le jeu de données utilisé en machine </a:t>
+            </a:r>
+            <a:r>
+              <a:rPr lang="fr-FR" dirty="0" err="1"/>
+              <a:t>learning</a:t>
+            </a:r>
+            <a:r>
+              <a:rPr lang="fr-FR" dirty="0"/>
+              <a:t> s’appel le </a:t>
+            </a:r>
+            <a:r>
+              <a:rPr lang="fr-FR" dirty="0" err="1"/>
+              <a:t>Dataset</a:t>
+            </a:r>
+            <a:endParaRPr lang="fr-FR" dirty="0"/>
+          </a:p>
+        </p:txBody>
+      </p:sp>
+    </p:spTree>
+    <p:extLst>
+      <p:ext uri="{BB962C8B-B14F-4D97-AF65-F5344CB8AC3E}">
+        <p14:creationId xmlns:p14="http://schemas.microsoft.com/office/powerpoint/2010/main" val="1841075970"/>
+      </p:ext>
+    </p:extLst>
+  </p:cSld>
+  <p:clrMapOvr>
+    <a:masterClrMapping/>
+  </p:clrMapOvr>
+</p:sld>
+</file>
+
+<file path=ppt/slides/slide40.xml><?xml version="1.0" encoding="utf-8"?>
 <p:sld xmlns:a="http://schemas.openxmlformats.org/drawingml/2006/main" xmlns:r="http://schemas.openxmlformats.org/officeDocument/2006/relationships" xmlns:p="http://schemas.openxmlformats.org/presentationml/2006/main">
   <p:cSld>
     <p:spTree>
@@ -7381,7 +7802,7 @@
 </p:sld>
 </file>
 
-<file path=ppt/slides/slide39.xml><?xml version="1.0" encoding="utf-8"?>
+<file path=ppt/slides/slide41.xml><?xml version="1.0" encoding="utf-8"?>
 <p:sld xmlns:a="http://schemas.openxmlformats.org/drawingml/2006/main" xmlns:r="http://schemas.openxmlformats.org/officeDocument/2006/relationships" xmlns:p="http://schemas.openxmlformats.org/presentationml/2006/main">
   <p:cSld>
     <p:spTree>
@@ -7557,7 +7978,7 @@
 </p:sld>
 </file>
 
-<file path=ppt/slides/slide4.xml><?xml version="1.0" encoding="utf-8"?>
+<file path=ppt/slides/slide42.xml><?xml version="1.0" encoding="utf-8"?>
 <p:sld xmlns:a="http://schemas.openxmlformats.org/drawingml/2006/main" xmlns:r="http://schemas.openxmlformats.org/officeDocument/2006/relationships" xmlns:p="http://schemas.openxmlformats.org/presentationml/2006/main">
   <p:cSld>
     <p:spTree>
@@ -7590,102 +8011,6 @@
           <a:lstStyle/>
           <a:p>
             <a:r>
-              <a:rPr lang="fr-FR" dirty="0"/>
-              <a:t>But</a:t>
-            </a:r>
-          </a:p>
-        </p:txBody>
-      </p:sp>
-      <p:sp>
-        <p:nvSpPr>
-          <p:cNvPr id="3" name="Espace réservé du contenu 2"/>
-          <p:cNvSpPr>
-            <a:spLocks noGrp="1"/>
-          </p:cNvSpPr>
-          <p:nvPr>
-            <p:ph idx="1"/>
-          </p:nvPr>
-        </p:nvSpPr>
-        <p:spPr/>
-        <p:txBody>
-          <a:bodyPr/>
-          <a:lstStyle/>
-          <a:p>
-            <a:r>
-              <a:rPr lang="fr-FR" dirty="0"/>
-              <a:t>En machine </a:t>
-            </a:r>
-            <a:r>
-              <a:rPr lang="fr-FR" dirty="0" err="1"/>
-              <a:t>learning</a:t>
-            </a:r>
-            <a:r>
-              <a:rPr lang="fr-FR" dirty="0"/>
-              <a:t> et en data science plus généralement, l'objectif est de trouver un modèle du phénomène à l'origine des données</a:t>
-            </a:r>
-          </a:p>
-          <a:p>
-            <a:r>
-              <a:rPr lang="fr-FR" dirty="0"/>
-              <a:t>C'est à dire qu'on considère que chaque donnée observée est l'expression d'une variable aléatoire générée par une distribution de probabilité</a:t>
-            </a:r>
-          </a:p>
-          <a:p>
-            <a:pPr lvl="1"/>
-            <a:r>
-              <a:rPr lang="fr-FR"/>
-              <a:t>Par exemple les sondages</a:t>
-            </a:r>
-            <a:endParaRPr lang="fr-FR" dirty="0"/>
-          </a:p>
-        </p:txBody>
-      </p:sp>
-    </p:spTree>
-    <p:extLst>
-      <p:ext uri="{BB962C8B-B14F-4D97-AF65-F5344CB8AC3E}">
-        <p14:creationId xmlns:p14="http://schemas.microsoft.com/office/powerpoint/2010/main" val="3282916395"/>
-      </p:ext>
-    </p:extLst>
-  </p:cSld>
-  <p:clrMapOvr>
-    <a:masterClrMapping/>
-  </p:clrMapOvr>
-</p:sld>
-</file>
-
-<file path=ppt/slides/slide40.xml><?xml version="1.0" encoding="utf-8"?>
-<p:sld xmlns:a="http://schemas.openxmlformats.org/drawingml/2006/main" xmlns:r="http://schemas.openxmlformats.org/officeDocument/2006/relationships" xmlns:p="http://schemas.openxmlformats.org/presentationml/2006/main">
-  <p:cSld>
-    <p:spTree>
-      <p:nvGrpSpPr>
-        <p:cNvPr id="1" name=""/>
-        <p:cNvGrpSpPr/>
-        <p:nvPr/>
-      </p:nvGrpSpPr>
-      <p:grpSpPr>
-        <a:xfrm>
-          <a:off x="0" y="0"/>
-          <a:ext cx="0" cy="0"/>
-          <a:chOff x="0" y="0"/>
-          <a:chExt cx="0" cy="0"/>
-        </a:xfrm>
-      </p:grpSpPr>
-      <p:sp>
-        <p:nvSpPr>
-          <p:cNvPr id="2" name="Titre 1"/>
-          <p:cNvSpPr>
-            <a:spLocks noGrp="1"/>
-          </p:cNvSpPr>
-          <p:nvPr>
-            <p:ph type="title"/>
-          </p:nvPr>
-        </p:nvSpPr>
-        <p:spPr/>
-        <p:txBody>
-          <a:bodyPr/>
-          <a:lstStyle/>
-          <a:p>
-            <a:r>
               <a:rPr lang="fr-FR" dirty="0" err="1"/>
               <a:t>Loss</a:t>
             </a:r>
@@ -7742,7 +8067,7 @@
 </p:sld>
 </file>
 
-<file path=ppt/slides/slide41.xml><?xml version="1.0" encoding="utf-8"?>
+<file path=ppt/slides/slide43.xml><?xml version="1.0" encoding="utf-8"?>
 <p:sld xmlns:a="http://schemas.openxmlformats.org/drawingml/2006/main" xmlns:r="http://schemas.openxmlformats.org/officeDocument/2006/relationships" xmlns:p="http://schemas.openxmlformats.org/presentationml/2006/main">
   <p:cSld>
     <p:spTree>
@@ -7864,7 +8189,7 @@
 </p:sld>
 </file>
 
-<file path=ppt/slides/slide42.xml><?xml version="1.0" encoding="utf-8"?>
+<file path=ppt/slides/slide44.xml><?xml version="1.0" encoding="utf-8"?>
 <p:sld xmlns:a="http://schemas.openxmlformats.org/drawingml/2006/main" xmlns:r="http://schemas.openxmlformats.org/officeDocument/2006/relationships" xmlns:p="http://schemas.openxmlformats.org/presentationml/2006/main">
   <p:cSld>
     <p:spTree>
@@ -7976,7 +8301,7 @@
 </p:sld>
 </file>
 
-<file path=ppt/slides/slide43.xml><?xml version="1.0" encoding="utf-8"?>
+<file path=ppt/slides/slide45.xml><?xml version="1.0" encoding="utf-8"?>
 <p:sld xmlns:a="http://schemas.openxmlformats.org/drawingml/2006/main" xmlns:r="http://schemas.openxmlformats.org/officeDocument/2006/relationships" xmlns:p="http://schemas.openxmlformats.org/presentationml/2006/main">
   <p:cSld>
     <p:spTree>
@@ -8170,203 +8495,6 @@
 </p:sld>
 </file>
 
-<file path=ppt/slides/slide44.xml><?xml version="1.0" encoding="utf-8"?>
-<p:sld xmlns:a="http://schemas.openxmlformats.org/drawingml/2006/main" xmlns:r="http://schemas.openxmlformats.org/officeDocument/2006/relationships" xmlns:p="http://schemas.openxmlformats.org/presentationml/2006/main">
-  <p:cSld>
-    <p:spTree>
-      <p:nvGrpSpPr>
-        <p:cNvPr id="1" name=""/>
-        <p:cNvGrpSpPr/>
-        <p:nvPr/>
-      </p:nvGrpSpPr>
-      <p:grpSpPr>
-        <a:xfrm>
-          <a:off x="0" y="0"/>
-          <a:ext cx="0" cy="0"/>
-          <a:chOff x="0" y="0"/>
-          <a:chExt cx="0" cy="0"/>
-        </a:xfrm>
-      </p:grpSpPr>
-      <p:sp>
-        <p:nvSpPr>
-          <p:cNvPr id="2" name="Titre 1"/>
-          <p:cNvSpPr>
-            <a:spLocks noGrp="1"/>
-          </p:cNvSpPr>
-          <p:nvPr>
-            <p:ph type="title"/>
-          </p:nvPr>
-        </p:nvSpPr>
-        <p:spPr/>
-        <p:txBody>
-          <a:bodyPr/>
-          <a:lstStyle/>
-          <a:p>
-            <a:r>
-              <a:rPr lang="fr-FR" dirty="0" err="1"/>
-              <a:t>Edmunt</a:t>
-            </a:r>
-            <a:r>
-              <a:rPr lang="fr-FR" dirty="0"/>
-              <a:t> Husserl</a:t>
-            </a:r>
-          </a:p>
-        </p:txBody>
-      </p:sp>
-      <p:sp>
-        <p:nvSpPr>
-          <p:cNvPr id="3" name="Espace réservé du contenu 2"/>
-          <p:cNvSpPr>
-            <a:spLocks noGrp="1"/>
-          </p:cNvSpPr>
-          <p:nvPr>
-            <p:ph idx="1"/>
-          </p:nvPr>
-        </p:nvSpPr>
-        <p:spPr/>
-        <p:txBody>
-          <a:bodyPr/>
-          <a:lstStyle/>
-          <a:p>
-            <a:r>
-              <a:rPr lang="fr-FR" dirty="0"/>
-              <a:t>« Les modèles sont les habits des idées, il y a toujours un modèle qui peut faire croire que votre idée est juste. »</a:t>
-            </a:r>
-          </a:p>
-        </p:txBody>
-      </p:sp>
-    </p:spTree>
-    <p:extLst>
-      <p:ext uri="{BB962C8B-B14F-4D97-AF65-F5344CB8AC3E}">
-        <p14:creationId xmlns:p14="http://schemas.microsoft.com/office/powerpoint/2010/main" val="3344571388"/>
-      </p:ext>
-    </p:extLst>
-  </p:cSld>
-  <p:clrMapOvr>
-    <a:masterClrMapping/>
-  </p:clrMapOvr>
-</p:sld>
-</file>
-
-<file path=ppt/slides/slide45.xml><?xml version="1.0" encoding="utf-8"?>
-<p:sld xmlns:a="http://schemas.openxmlformats.org/drawingml/2006/main" xmlns:r="http://schemas.openxmlformats.org/officeDocument/2006/relationships" xmlns:p="http://schemas.openxmlformats.org/presentationml/2006/main">
-  <p:cSld>
-    <p:spTree>
-      <p:nvGrpSpPr>
-        <p:cNvPr id="1" name=""/>
-        <p:cNvGrpSpPr/>
-        <p:nvPr/>
-      </p:nvGrpSpPr>
-      <p:grpSpPr>
-        <a:xfrm>
-          <a:off x="0" y="0"/>
-          <a:ext cx="0" cy="0"/>
-          <a:chOff x="0" y="0"/>
-          <a:chExt cx="0" cy="0"/>
-        </a:xfrm>
-      </p:grpSpPr>
-      <p:sp>
-        <p:nvSpPr>
-          <p:cNvPr id="2" name="Titre 1"/>
-          <p:cNvSpPr>
-            <a:spLocks noGrp="1"/>
-          </p:cNvSpPr>
-          <p:nvPr>
-            <p:ph type="title"/>
-          </p:nvPr>
-        </p:nvSpPr>
-        <p:spPr/>
-        <p:txBody>
-          <a:bodyPr/>
-          <a:lstStyle/>
-          <a:p>
-            <a:r>
-              <a:rPr lang="fr-FR" dirty="0"/>
-              <a:t>Considération sur les tailles</a:t>
-            </a:r>
-          </a:p>
-        </p:txBody>
-      </p:sp>
-      <p:sp>
-        <p:nvSpPr>
-          <p:cNvPr id="3" name="Espace réservé du contenu 2"/>
-          <p:cNvSpPr>
-            <a:spLocks noGrp="1"/>
-          </p:cNvSpPr>
-          <p:nvPr>
-            <p:ph idx="1"/>
-          </p:nvPr>
-        </p:nvSpPr>
-        <p:spPr/>
-        <p:txBody>
-          <a:bodyPr/>
-          <a:lstStyle/>
-          <a:p>
-            <a:r>
-              <a:rPr lang="fr-FR" dirty="0"/>
-              <a:t>Les processeurs d’aujourd’hui en en 64 bits (x64)</a:t>
-            </a:r>
-          </a:p>
-          <a:p>
-            <a:pPr lvl="1"/>
-            <a:r>
-              <a:rPr lang="fr-FR" dirty="0"/>
-              <a:t>Les GPU sont sur 128 bits</a:t>
-            </a:r>
-          </a:p>
-          <a:p>
-            <a:pPr lvl="1"/>
-            <a:r>
-              <a:rPr lang="fr-FR" dirty="0"/>
-              <a:t>Les anciens processeurs sur 32 bits</a:t>
-            </a:r>
-          </a:p>
-          <a:p>
-            <a:pPr lvl="1"/>
-            <a:r>
-              <a:rPr lang="fr-FR" dirty="0"/>
-              <a:t>Python existe en version 32 et 64 bits</a:t>
-            </a:r>
-          </a:p>
-          <a:p>
-            <a:r>
-              <a:rPr lang="fr-FR" dirty="0"/>
-              <a:t>Un processeur 32 bits ne peut adresser que 2^32 bits soit 4Gbit</a:t>
-            </a:r>
-          </a:p>
-          <a:p>
-            <a:pPr lvl="1"/>
-            <a:r>
-              <a:rPr lang="fr-FR" dirty="0"/>
-              <a:t>Une adresse mémoire est souvent sur 1 octet ce qui donne 4Go de mémoire maximum, sachant que près de la moitié est pris par l’OS</a:t>
-            </a:r>
-          </a:p>
-          <a:p>
-            <a:r>
-              <a:rPr lang="fr-FR" dirty="0"/>
-              <a:t>Un processeur 64 bits sait adressé 8000 </a:t>
-            </a:r>
-            <a:r>
-              <a:rPr lang="fr-FR" dirty="0" err="1"/>
-              <a:t>Pbit</a:t>
-            </a:r>
-            <a:endParaRPr lang="fr-FR" dirty="0"/>
-          </a:p>
-        </p:txBody>
-      </p:sp>
-    </p:spTree>
-    <p:extLst>
-      <p:ext uri="{BB962C8B-B14F-4D97-AF65-F5344CB8AC3E}">
-        <p14:creationId xmlns:p14="http://schemas.microsoft.com/office/powerpoint/2010/main" val="1996995698"/>
-      </p:ext>
-    </p:extLst>
-  </p:cSld>
-  <p:clrMapOvr>
-    <a:masterClrMapping/>
-  </p:clrMapOvr>
-</p:sld>
-</file>
-
 <file path=ppt/slides/slide46.xml><?xml version="1.0" encoding="utf-8"?>
 <p:sld xmlns:a="http://schemas.openxmlformats.org/drawingml/2006/main" xmlns:r="http://schemas.openxmlformats.org/officeDocument/2006/relationships" xmlns:p="http://schemas.openxmlformats.org/presentationml/2006/main">
   <p:cSld>
@@ -8400,8 +8528,12 @@
           <a:lstStyle/>
           <a:p>
             <a:r>
-              <a:rPr lang="fr-FR" dirty="0"/>
-              <a:t>Considération sur les tailles</a:t>
+              <a:rPr lang="fr-FR" dirty="0" err="1"/>
+              <a:t>Edmunt</a:t>
+            </a:r>
+            <a:r>
+              <a:rPr lang="fr-FR" dirty="0"/>
+              <a:t> Husserl</a:t>
             </a:r>
           </a:p>
         </p:txBody>
@@ -8422,6 +8554,199 @@
           <a:lstStyle/>
           <a:p>
             <a:r>
+              <a:rPr lang="fr-FR" dirty="0"/>
+              <a:t>« Les modèles sont les habits des idées, il y a toujours un modèle qui peut faire croire que votre idée est juste. »</a:t>
+            </a:r>
+          </a:p>
+        </p:txBody>
+      </p:sp>
+    </p:spTree>
+    <p:extLst>
+      <p:ext uri="{BB962C8B-B14F-4D97-AF65-F5344CB8AC3E}">
+        <p14:creationId xmlns:p14="http://schemas.microsoft.com/office/powerpoint/2010/main" val="3344571388"/>
+      </p:ext>
+    </p:extLst>
+  </p:cSld>
+  <p:clrMapOvr>
+    <a:masterClrMapping/>
+  </p:clrMapOvr>
+</p:sld>
+</file>
+
+<file path=ppt/slides/slide47.xml><?xml version="1.0" encoding="utf-8"?>
+<p:sld xmlns:a="http://schemas.openxmlformats.org/drawingml/2006/main" xmlns:r="http://schemas.openxmlformats.org/officeDocument/2006/relationships" xmlns:p="http://schemas.openxmlformats.org/presentationml/2006/main">
+  <p:cSld>
+    <p:spTree>
+      <p:nvGrpSpPr>
+        <p:cNvPr id="1" name=""/>
+        <p:cNvGrpSpPr/>
+        <p:nvPr/>
+      </p:nvGrpSpPr>
+      <p:grpSpPr>
+        <a:xfrm>
+          <a:off x="0" y="0"/>
+          <a:ext cx="0" cy="0"/>
+          <a:chOff x="0" y="0"/>
+          <a:chExt cx="0" cy="0"/>
+        </a:xfrm>
+      </p:grpSpPr>
+      <p:sp>
+        <p:nvSpPr>
+          <p:cNvPr id="2" name="Titre 1"/>
+          <p:cNvSpPr>
+            <a:spLocks noGrp="1"/>
+          </p:cNvSpPr>
+          <p:nvPr>
+            <p:ph type="title"/>
+          </p:nvPr>
+        </p:nvSpPr>
+        <p:spPr/>
+        <p:txBody>
+          <a:bodyPr/>
+          <a:lstStyle/>
+          <a:p>
+            <a:r>
+              <a:rPr lang="fr-FR" dirty="0"/>
+              <a:t>Considération sur les tailles</a:t>
+            </a:r>
+          </a:p>
+        </p:txBody>
+      </p:sp>
+      <p:sp>
+        <p:nvSpPr>
+          <p:cNvPr id="3" name="Espace réservé du contenu 2"/>
+          <p:cNvSpPr>
+            <a:spLocks noGrp="1"/>
+          </p:cNvSpPr>
+          <p:nvPr>
+            <p:ph idx="1"/>
+          </p:nvPr>
+        </p:nvSpPr>
+        <p:spPr/>
+        <p:txBody>
+          <a:bodyPr/>
+          <a:lstStyle/>
+          <a:p>
+            <a:r>
+              <a:rPr lang="fr-FR" dirty="0"/>
+              <a:t>Les processeurs d’aujourd’hui en en 64 bits (x64)</a:t>
+            </a:r>
+          </a:p>
+          <a:p>
+            <a:pPr lvl="1"/>
+            <a:r>
+              <a:rPr lang="fr-FR" dirty="0"/>
+              <a:t>Les GPU sont sur 128 bits</a:t>
+            </a:r>
+          </a:p>
+          <a:p>
+            <a:pPr lvl="1"/>
+            <a:r>
+              <a:rPr lang="fr-FR" dirty="0"/>
+              <a:t>Les anciens processeurs sur 32 bits</a:t>
+            </a:r>
+          </a:p>
+          <a:p>
+            <a:pPr lvl="1"/>
+            <a:r>
+              <a:rPr lang="fr-FR" dirty="0"/>
+              <a:t>Python existe en version 32 et 64 bits</a:t>
+            </a:r>
+          </a:p>
+          <a:p>
+            <a:r>
+              <a:rPr lang="fr-FR" dirty="0"/>
+              <a:t>Un processeur 32 bits ne peut adresser que 2^32 bits soit 4Gbit</a:t>
+            </a:r>
+          </a:p>
+          <a:p>
+            <a:pPr lvl="1"/>
+            <a:r>
+              <a:rPr lang="fr-FR" dirty="0"/>
+              <a:t>Une adresse mémoire est souvent sur 1 octet ce qui donne 4Go de mémoire maximum, sachant que près de la moitié est pris par l’OS</a:t>
+            </a:r>
+          </a:p>
+          <a:p>
+            <a:r>
+              <a:rPr lang="fr-FR" dirty="0"/>
+              <a:t>Un processeur 64 bits sait adressé 8000 </a:t>
+            </a:r>
+            <a:r>
+              <a:rPr lang="fr-FR" dirty="0" err="1"/>
+              <a:t>Pbit</a:t>
+            </a:r>
+            <a:endParaRPr lang="fr-FR" dirty="0"/>
+          </a:p>
+        </p:txBody>
+      </p:sp>
+    </p:spTree>
+    <p:extLst>
+      <p:ext uri="{BB962C8B-B14F-4D97-AF65-F5344CB8AC3E}">
+        <p14:creationId xmlns:p14="http://schemas.microsoft.com/office/powerpoint/2010/main" val="1996995698"/>
+      </p:ext>
+    </p:extLst>
+  </p:cSld>
+  <p:clrMapOvr>
+    <a:masterClrMapping/>
+  </p:clrMapOvr>
+</p:sld>
+</file>
+
+<file path=ppt/slides/slide48.xml><?xml version="1.0" encoding="utf-8"?>
+<p:sld xmlns:a="http://schemas.openxmlformats.org/drawingml/2006/main" xmlns:r="http://schemas.openxmlformats.org/officeDocument/2006/relationships" xmlns:p="http://schemas.openxmlformats.org/presentationml/2006/main">
+  <p:cSld>
+    <p:spTree>
+      <p:nvGrpSpPr>
+        <p:cNvPr id="1" name=""/>
+        <p:cNvGrpSpPr/>
+        <p:nvPr/>
+      </p:nvGrpSpPr>
+      <p:grpSpPr>
+        <a:xfrm>
+          <a:off x="0" y="0"/>
+          <a:ext cx="0" cy="0"/>
+          <a:chOff x="0" y="0"/>
+          <a:chExt cx="0" cy="0"/>
+        </a:xfrm>
+      </p:grpSpPr>
+      <p:sp>
+        <p:nvSpPr>
+          <p:cNvPr id="2" name="Titre 1"/>
+          <p:cNvSpPr>
+            <a:spLocks noGrp="1"/>
+          </p:cNvSpPr>
+          <p:nvPr>
+            <p:ph type="title"/>
+          </p:nvPr>
+        </p:nvSpPr>
+        <p:spPr/>
+        <p:txBody>
+          <a:bodyPr/>
+          <a:lstStyle/>
+          <a:p>
+            <a:r>
+              <a:rPr lang="fr-FR" dirty="0"/>
+              <a:t>Considération sur les tailles</a:t>
+            </a:r>
+          </a:p>
+        </p:txBody>
+      </p:sp>
+      <p:sp>
+        <p:nvSpPr>
+          <p:cNvPr id="3" name="Espace réservé du contenu 2"/>
+          <p:cNvSpPr>
+            <a:spLocks noGrp="1"/>
+          </p:cNvSpPr>
+          <p:nvPr>
+            <p:ph idx="1"/>
+          </p:nvPr>
+        </p:nvSpPr>
+        <p:spPr/>
+        <p:txBody>
+          <a:bodyPr/>
+          <a:lstStyle/>
+          <a:p>
+            <a:r>
               <a:rPr lang="fr-FR" sz="2400" dirty="0"/>
               <a:t>En Python un flottant fait 32 bits</a:t>
             </a:r>
@@ -8490,7 +8815,7 @@
           <a:p>
             <a:r>
               <a:rPr lang="fr-FR" sz="2400" dirty="0"/>
-              <a:t>Une image 4K fait 16Mo</a:t>
+              <a:t>Une image 4K RAW fait 16Mo</a:t>
             </a:r>
           </a:p>
           <a:p>
@@ -8518,7 +8843,7 @@
 </p:sld>
 </file>
 
-<file path=ppt/slides/slide47.xml><?xml version="1.0" encoding="utf-8"?>
+<file path=ppt/slides/slide49.xml><?xml version="1.0" encoding="utf-8"?>
 <p:sld xmlns:a="http://schemas.openxmlformats.org/drawingml/2006/main" xmlns:r="http://schemas.openxmlformats.org/officeDocument/2006/relationships" xmlns:p="http://schemas.openxmlformats.org/presentationml/2006/main">
   <p:cSld>
     <p:spTree>
@@ -8596,7 +8921,103 @@
 </p:sld>
 </file>
 
-<file path=ppt/slides/slide48.xml><?xml version="1.0" encoding="utf-8"?>
+<file path=ppt/slides/slide5.xml><?xml version="1.0" encoding="utf-8"?>
+<p:sld xmlns:a="http://schemas.openxmlformats.org/drawingml/2006/main" xmlns:r="http://schemas.openxmlformats.org/officeDocument/2006/relationships" xmlns:p="http://schemas.openxmlformats.org/presentationml/2006/main">
+  <p:cSld>
+    <p:spTree>
+      <p:nvGrpSpPr>
+        <p:cNvPr id="1" name=""/>
+        <p:cNvGrpSpPr/>
+        <p:nvPr/>
+      </p:nvGrpSpPr>
+      <p:grpSpPr>
+        <a:xfrm>
+          <a:off x="0" y="0"/>
+          <a:ext cx="0" cy="0"/>
+          <a:chOff x="0" y="0"/>
+          <a:chExt cx="0" cy="0"/>
+        </a:xfrm>
+      </p:grpSpPr>
+      <p:sp>
+        <p:nvSpPr>
+          <p:cNvPr id="2" name="Titre 1"/>
+          <p:cNvSpPr>
+            <a:spLocks noGrp="1"/>
+          </p:cNvSpPr>
+          <p:nvPr>
+            <p:ph type="title"/>
+          </p:nvPr>
+        </p:nvSpPr>
+        <p:spPr/>
+        <p:txBody>
+          <a:bodyPr/>
+          <a:lstStyle/>
+          <a:p>
+            <a:r>
+              <a:rPr lang="fr-FR" dirty="0"/>
+              <a:t>But</a:t>
+            </a:r>
+          </a:p>
+        </p:txBody>
+      </p:sp>
+      <p:sp>
+        <p:nvSpPr>
+          <p:cNvPr id="3" name="Espace réservé du contenu 2"/>
+          <p:cNvSpPr>
+            <a:spLocks noGrp="1"/>
+          </p:cNvSpPr>
+          <p:nvPr>
+            <p:ph idx="1"/>
+          </p:nvPr>
+        </p:nvSpPr>
+        <p:spPr/>
+        <p:txBody>
+          <a:bodyPr/>
+          <a:lstStyle/>
+          <a:p>
+            <a:r>
+              <a:rPr lang="fr-FR" dirty="0"/>
+              <a:t>En machine </a:t>
+            </a:r>
+            <a:r>
+              <a:rPr lang="fr-FR" dirty="0" err="1"/>
+              <a:t>learning</a:t>
+            </a:r>
+            <a:r>
+              <a:rPr lang="fr-FR" dirty="0"/>
+              <a:t> et en data science plus généralement, l'objectif est de trouver un modèle du phénomène à l'origine des données</a:t>
+            </a:r>
+          </a:p>
+          <a:p>
+            <a:r>
+              <a:rPr lang="fr-FR" dirty="0"/>
+              <a:t>C'est à dire qu'on considère que chaque donnée observée est l'expression d'une variable aléatoire générée par une distribution de probabilité</a:t>
+            </a:r>
+          </a:p>
+          <a:p>
+            <a:pPr lvl="1"/>
+            <a:r>
+              <a:rPr lang="fr-FR"/>
+              <a:t>Par exemple les sondages</a:t>
+            </a:r>
+            <a:endParaRPr lang="fr-FR" dirty="0"/>
+          </a:p>
+        </p:txBody>
+      </p:sp>
+    </p:spTree>
+    <p:extLst>
+      <p:ext uri="{BB962C8B-B14F-4D97-AF65-F5344CB8AC3E}">
+        <p14:creationId xmlns:p14="http://schemas.microsoft.com/office/powerpoint/2010/main" val="3282916395"/>
+      </p:ext>
+    </p:extLst>
+  </p:cSld>
+  <p:clrMapOvr>
+    <a:masterClrMapping/>
+  </p:clrMapOvr>
+</p:sld>
+</file>
+
+<file path=ppt/slides/slide50.xml><?xml version="1.0" encoding="utf-8"?>
 <p:sld xmlns:a="http://schemas.openxmlformats.org/drawingml/2006/main" xmlns:r="http://schemas.openxmlformats.org/officeDocument/2006/relationships" xmlns:p="http://schemas.openxmlformats.org/presentationml/2006/main">
   <p:cSld>
     <p:spTree>
@@ -8737,7 +9158,7 @@
 </p:sld>
 </file>
 
-<file path=ppt/slides/slide5.xml><?xml version="1.0" encoding="utf-8"?>
+<file path=ppt/slides/slide6.xml><?xml version="1.0" encoding="utf-8"?>
 <p:sld xmlns:a="http://schemas.openxmlformats.org/drawingml/2006/main" xmlns:r="http://schemas.openxmlformats.org/officeDocument/2006/relationships" xmlns:p="http://schemas.openxmlformats.org/presentationml/2006/main">
   <p:cSld>
     <p:spTree>
@@ -8841,7 +9262,7 @@
 </p:sld>
 </file>
 
-<file path=ppt/slides/slide6.xml><?xml version="1.0" encoding="utf-8"?>
+<file path=ppt/slides/slide7.xml><?xml version="1.0" encoding="utf-8"?>
 <p:sld xmlns:a="http://schemas.openxmlformats.org/drawingml/2006/main" xmlns:r="http://schemas.openxmlformats.org/officeDocument/2006/relationships" xmlns:p="http://schemas.openxmlformats.org/presentationml/2006/main">
   <p:cSld>
     <p:spTree>
@@ -8956,7 +9377,7 @@
 </p:sld>
 </file>
 
-<file path=ppt/slides/slide7.xml><?xml version="1.0" encoding="utf-8"?>
+<file path=ppt/slides/slide8.xml><?xml version="1.0" encoding="utf-8"?>
 <p:sld xmlns:a="http://schemas.openxmlformats.org/drawingml/2006/main" xmlns:r="http://schemas.openxmlformats.org/officeDocument/2006/relationships" xmlns:p="http://schemas.openxmlformats.org/presentationml/2006/main">
   <p:cSld>
     <p:spTree>
@@ -9072,7 +9493,7 @@
 </p:sld>
 </file>
 
-<file path=ppt/slides/slide8.xml><?xml version="1.0" encoding="utf-8"?>
+<file path=ppt/slides/slide9.xml><?xml version="1.0" encoding="utf-8"?>
 <p:sld xmlns:a="http://schemas.openxmlformats.org/drawingml/2006/main" xmlns:r="http://schemas.openxmlformats.org/officeDocument/2006/relationships" xmlns:p="http://schemas.openxmlformats.org/presentationml/2006/main">
   <p:cSld>
     <p:spTree>
@@ -9181,145 +9602,6 @@
     <p:extLst>
       <p:ext uri="{BB962C8B-B14F-4D97-AF65-F5344CB8AC3E}">
         <p14:creationId xmlns:p14="http://schemas.microsoft.com/office/powerpoint/2010/main" val="1466637708"/>
-      </p:ext>
-    </p:extLst>
-  </p:cSld>
-  <p:clrMapOvr>
-    <a:masterClrMapping/>
-  </p:clrMapOvr>
-</p:sld>
-</file>
-
-<file path=ppt/slides/slide9.xml><?xml version="1.0" encoding="utf-8"?>
-<p:sld xmlns:a="http://schemas.openxmlformats.org/drawingml/2006/main" xmlns:r="http://schemas.openxmlformats.org/officeDocument/2006/relationships" xmlns:p="http://schemas.openxmlformats.org/presentationml/2006/main">
-  <p:cSld>
-    <p:spTree>
-      <p:nvGrpSpPr>
-        <p:cNvPr id="1" name=""/>
-        <p:cNvGrpSpPr/>
-        <p:nvPr/>
-      </p:nvGrpSpPr>
-      <p:grpSpPr>
-        <a:xfrm>
-          <a:off x="0" y="0"/>
-          <a:ext cx="0" cy="0"/>
-          <a:chOff x="0" y="0"/>
-          <a:chExt cx="0" cy="0"/>
-        </a:xfrm>
-      </p:grpSpPr>
-      <p:sp>
-        <p:nvSpPr>
-          <p:cNvPr id="2" name="Titre 1"/>
-          <p:cNvSpPr>
-            <a:spLocks noGrp="1"/>
-          </p:cNvSpPr>
-          <p:nvPr>
-            <p:ph type="title"/>
-          </p:nvPr>
-        </p:nvSpPr>
-        <p:spPr/>
-        <p:txBody>
-          <a:bodyPr/>
-          <a:lstStyle/>
-          <a:p>
-            <a:r>
-              <a:rPr lang="fr-FR" dirty="0"/>
-              <a:t>Erreur</a:t>
-            </a:r>
-          </a:p>
-        </p:txBody>
-      </p:sp>
-      <p:sp>
-        <p:nvSpPr>
-          <p:cNvPr id="3" name="Espace réservé du contenu 2"/>
-          <p:cNvSpPr>
-            <a:spLocks noGrp="1"/>
-          </p:cNvSpPr>
-          <p:nvPr>
-            <p:ph idx="1"/>
-          </p:nvPr>
-        </p:nvSpPr>
-        <p:spPr/>
-        <p:txBody>
-          <a:bodyPr/>
-          <a:lstStyle/>
-          <a:p>
-            <a:r>
-              <a:rPr lang="fr-FR" dirty="0"/>
-              <a:t>Un écart type et un taux de confiance peut être calculé</a:t>
-            </a:r>
-          </a:p>
-          <a:p>
-            <a:endParaRPr lang="fr-FR" dirty="0"/>
-          </a:p>
-          <a:p>
-            <a:endParaRPr lang="fr-FR" dirty="0"/>
-          </a:p>
-          <a:p>
-            <a:endParaRPr lang="fr-FR" dirty="0"/>
-          </a:p>
-          <a:p>
-            <a:endParaRPr lang="fr-FR" dirty="0"/>
-          </a:p>
-          <a:p>
-            <a:endParaRPr lang="fr-FR" dirty="0"/>
-          </a:p>
-          <a:p>
-            <a:endParaRPr lang="fr-FR" dirty="0"/>
-          </a:p>
-          <a:p>
-            <a:r>
-              <a:rPr lang="fr-FR" dirty="0"/>
-              <a:t>Exemple : taux de confiance à 90%</a:t>
-            </a:r>
-          </a:p>
-        </p:txBody>
-      </p:sp>
-      <p:pic>
-        <p:nvPicPr>
-          <p:cNvPr id="3074" name="Picture 2" descr="l'intervalle de confiance (à 90%) que les point se trouvent dans cette zone"/>
-          <p:cNvPicPr>
-            <a:picLocks noChangeAspect="1" noChangeArrowheads="1"/>
-          </p:cNvPicPr>
-          <p:nvPr/>
-        </p:nvPicPr>
-        <p:blipFill>
-          <a:blip r:embed="rId2">
-            <a:extLst>
-              <a:ext uri="{28A0092B-C50C-407E-A947-70E740481C1C}">
-                <a14:useLocalDpi xmlns:a14="http://schemas.microsoft.com/office/drawing/2010/main" val="0"/>
-              </a:ext>
-            </a:extLst>
-          </a:blip>
-          <a:srcRect/>
-          <a:stretch>
-            <a:fillRect/>
-          </a:stretch>
-        </p:blipFill>
-        <p:spPr bwMode="auto">
-          <a:xfrm>
-            <a:off x="2195736" y="2276872"/>
-            <a:ext cx="4286250" cy="3000376"/>
-          </a:xfrm>
-          <a:prstGeom prst="rect">
-            <a:avLst/>
-          </a:prstGeom>
-          <a:noFill/>
-          <a:extLst>
-            <a:ext uri="{909E8E84-426E-40DD-AFC4-6F175D3DCCD1}">
-              <a14:hiddenFill xmlns:a14="http://schemas.microsoft.com/office/drawing/2010/main">
-                <a:solidFill>
-                  <a:srgbClr val="FFFFFF"/>
-                </a:solidFill>
-              </a14:hiddenFill>
-            </a:ext>
-          </a:extLst>
-        </p:spPr>
-      </p:pic>
-    </p:spTree>
-    <p:extLst>
-      <p:ext uri="{BB962C8B-B14F-4D97-AF65-F5344CB8AC3E}">
-        <p14:creationId xmlns:p14="http://schemas.microsoft.com/office/powerpoint/2010/main" val="2468921661"/>
       </p:ext>
     </p:extLst>
   </p:cSld>
